--- a/docs/夏季メタバース集中講義/メタバースについて講義/スライド/メタバースとは？_夏季メタバース集中講義20260727.pptx
+++ b/docs/夏季メタバース集中講義/メタバースについて講義/スライド/メタバースとは？_夏季メタバース集中講義20260727.pptx
@@ -861,7 +861,7 @@
   <p:cSld>
     <p:spTree>
       <p:nvGrpSpPr>
-        <p:cNvPr id="314" name="Shape 314"/>
+        <p:cNvPr id="313" name="Shape 313"/>
         <p:cNvGrpSpPr/>
         <p:nvPr/>
       </p:nvGrpSpPr>
@@ -875,7 +875,7 @@
       </p:grpSpPr>
       <p:sp>
         <p:nvSpPr>
-          <p:cNvPr id="315" name="Google Shape;315;g3f5a7760ed2_2_283:notes"/>
+          <p:cNvPr id="314" name="Google Shape;314;g3f5a7760ed2_2_283:notes"/>
           <p:cNvSpPr/>
           <p:nvPr>
             <p:ph idx="2" type="sldImg"/>
@@ -920,7 +920,7 @@
       </p:sp>
       <p:sp>
         <p:nvSpPr>
-          <p:cNvPr id="316" name="Google Shape;316;g3f5a7760ed2_2_283:notes"/>
+          <p:cNvPr id="315" name="Google Shape;315;g3f5a7760ed2_2_283:notes"/>
           <p:cNvSpPr txBox="1"/>
           <p:nvPr>
             <p:ph idx="1" type="body"/>
@@ -963,7 +963,7 @@
       </p:sp>
       <p:sp>
         <p:nvSpPr>
-          <p:cNvPr id="317" name="Google Shape;317;g3f5a7760ed2_2_283:notes"/>
+          <p:cNvPr id="316" name="Google Shape;316;g3f5a7760ed2_2_283:notes"/>
           <p:cNvSpPr txBox="1"/>
           <p:nvPr>
             <p:ph idx="12" type="sldNum"/>
@@ -1018,7 +1018,7 @@
   <p:cSld>
     <p:spTree>
       <p:nvGrpSpPr>
-        <p:cNvPr id="334" name="Shape 334"/>
+        <p:cNvPr id="333" name="Shape 333"/>
         <p:cNvGrpSpPr/>
         <p:nvPr/>
       </p:nvGrpSpPr>
@@ -1032,7 +1032,7 @@
       </p:grpSpPr>
       <p:sp>
         <p:nvSpPr>
-          <p:cNvPr id="335" name="Google Shape;335;g3f5a7760ed2_2_302:notes"/>
+          <p:cNvPr id="334" name="Google Shape;334;g3f5a7760ed2_2_302:notes"/>
           <p:cNvSpPr/>
           <p:nvPr>
             <p:ph idx="2" type="sldImg"/>
@@ -1077,7 +1077,7 @@
       </p:sp>
       <p:sp>
         <p:nvSpPr>
-          <p:cNvPr id="336" name="Google Shape;336;g3f5a7760ed2_2_302:notes"/>
+          <p:cNvPr id="335" name="Google Shape;335;g3f5a7760ed2_2_302:notes"/>
           <p:cNvSpPr txBox="1"/>
           <p:nvPr>
             <p:ph idx="1" type="body"/>
@@ -1120,7 +1120,7 @@
       </p:sp>
       <p:sp>
         <p:nvSpPr>
-          <p:cNvPr id="337" name="Google Shape;337;g3f5a7760ed2_2_302:notes"/>
+          <p:cNvPr id="336" name="Google Shape;336;g3f5a7760ed2_2_302:notes"/>
           <p:cNvSpPr txBox="1"/>
           <p:nvPr>
             <p:ph idx="12" type="sldNum"/>
@@ -1175,7 +1175,7 @@
   <p:cSld>
     <p:spTree>
       <p:nvGrpSpPr>
-        <p:cNvPr id="356" name="Shape 356"/>
+        <p:cNvPr id="355" name="Shape 355"/>
         <p:cNvGrpSpPr/>
         <p:nvPr/>
       </p:nvGrpSpPr>
@@ -1189,7 +1189,7 @@
       </p:grpSpPr>
       <p:sp>
         <p:nvSpPr>
-          <p:cNvPr id="357" name="Google Shape;357;g3f5a7760ed2_2_323:notes"/>
+          <p:cNvPr id="356" name="Google Shape;356;g3f5a7760ed2_2_323:notes"/>
           <p:cNvSpPr/>
           <p:nvPr>
             <p:ph idx="2" type="sldImg"/>
@@ -1234,7 +1234,7 @@
       </p:sp>
       <p:sp>
         <p:nvSpPr>
-          <p:cNvPr id="358" name="Google Shape;358;g3f5a7760ed2_2_323:notes"/>
+          <p:cNvPr id="357" name="Google Shape;357;g3f5a7760ed2_2_323:notes"/>
           <p:cNvSpPr txBox="1"/>
           <p:nvPr>
             <p:ph idx="1" type="body"/>
@@ -1277,7 +1277,7 @@
       </p:sp>
       <p:sp>
         <p:nvSpPr>
-          <p:cNvPr id="359" name="Google Shape;359;g3f5a7760ed2_2_323:notes"/>
+          <p:cNvPr id="358" name="Google Shape;358;g3f5a7760ed2_2_323:notes"/>
           <p:cNvSpPr txBox="1"/>
           <p:nvPr>
             <p:ph idx="12" type="sldNum"/>
@@ -1332,7 +1332,7 @@
   <p:cSld>
     <p:spTree>
       <p:nvGrpSpPr>
-        <p:cNvPr id="384" name="Shape 384"/>
+        <p:cNvPr id="383" name="Shape 383"/>
         <p:cNvGrpSpPr/>
         <p:nvPr/>
       </p:nvGrpSpPr>
@@ -1346,7 +1346,7 @@
       </p:grpSpPr>
       <p:sp>
         <p:nvSpPr>
-          <p:cNvPr id="385" name="Google Shape;385;g3f5a7760ed2_2_248:notes"/>
+          <p:cNvPr id="384" name="Google Shape;384;g3f5a7760ed2_2_248:notes"/>
           <p:cNvSpPr/>
           <p:nvPr>
             <p:ph idx="2" type="sldImg"/>
@@ -1391,7 +1391,7 @@
       </p:sp>
       <p:sp>
         <p:nvSpPr>
-          <p:cNvPr id="386" name="Google Shape;386;g3f5a7760ed2_2_248:notes"/>
+          <p:cNvPr id="385" name="Google Shape;385;g3f5a7760ed2_2_248:notes"/>
           <p:cNvSpPr txBox="1"/>
           <p:nvPr>
             <p:ph idx="1" type="body"/>
@@ -1434,7 +1434,7 @@
       </p:sp>
       <p:sp>
         <p:nvSpPr>
-          <p:cNvPr id="387" name="Google Shape;387;g3f5a7760ed2_2_248:notes"/>
+          <p:cNvPr id="386" name="Google Shape;386;g3f5a7760ed2_2_248:notes"/>
           <p:cNvSpPr txBox="1"/>
           <p:nvPr>
             <p:ph idx="12" type="sldNum"/>
@@ -1489,7 +1489,7 @@
   <p:cSld>
     <p:spTree>
       <p:nvGrpSpPr>
-        <p:cNvPr id="70" name="Shape 70"/>
+        <p:cNvPr id="68" name="Shape 68"/>
         <p:cNvGrpSpPr/>
         <p:nvPr/>
       </p:nvGrpSpPr>
@@ -1503,7 +1503,7 @@
       </p:grpSpPr>
       <p:sp>
         <p:nvSpPr>
-          <p:cNvPr id="71" name="Google Shape;71;g3f5a7760ed2_2_22:notes"/>
+          <p:cNvPr id="69" name="Google Shape;69;g3f5a7760ed2_2_22:notes"/>
           <p:cNvSpPr/>
           <p:nvPr>
             <p:ph idx="2" type="sldImg"/>
@@ -1548,7 +1548,7 @@
       </p:sp>
       <p:sp>
         <p:nvSpPr>
-          <p:cNvPr id="72" name="Google Shape;72;g3f5a7760ed2_2_22:notes"/>
+          <p:cNvPr id="70" name="Google Shape;70;g3f5a7760ed2_2_22:notes"/>
           <p:cNvSpPr txBox="1"/>
           <p:nvPr>
             <p:ph idx="1" type="body"/>
@@ -1591,7 +1591,7 @@
       </p:sp>
       <p:sp>
         <p:nvSpPr>
-          <p:cNvPr id="73" name="Google Shape;73;g3f5a7760ed2_2_22:notes"/>
+          <p:cNvPr id="71" name="Google Shape;71;g3f5a7760ed2_2_22:notes"/>
           <p:cNvSpPr txBox="1"/>
           <p:nvPr>
             <p:ph idx="12" type="sldNum"/>
@@ -1646,7 +1646,7 @@
   <p:cSld>
     <p:spTree>
       <p:nvGrpSpPr>
-        <p:cNvPr id="106" name="Shape 106"/>
+        <p:cNvPr id="104" name="Shape 104"/>
         <p:cNvGrpSpPr/>
         <p:nvPr/>
       </p:nvGrpSpPr>
@@ -1660,7 +1660,7 @@
       </p:grpSpPr>
       <p:sp>
         <p:nvSpPr>
-          <p:cNvPr id="107" name="Google Shape;107;g3f5a7760ed2_2_57:notes"/>
+          <p:cNvPr id="105" name="Google Shape;105;g3f5a7760ed2_2_57:notes"/>
           <p:cNvSpPr/>
           <p:nvPr>
             <p:ph idx="2" type="sldImg"/>
@@ -1705,7 +1705,7 @@
       </p:sp>
       <p:sp>
         <p:nvSpPr>
-          <p:cNvPr id="108" name="Google Shape;108;g3f5a7760ed2_2_57:notes"/>
+          <p:cNvPr id="106" name="Google Shape;106;g3f5a7760ed2_2_57:notes"/>
           <p:cNvSpPr txBox="1"/>
           <p:nvPr>
             <p:ph idx="1" type="body"/>
@@ -1748,7 +1748,7 @@
       </p:sp>
       <p:sp>
         <p:nvSpPr>
-          <p:cNvPr id="109" name="Google Shape;109;g3f5a7760ed2_2_57:notes"/>
+          <p:cNvPr id="107" name="Google Shape;107;g3f5a7760ed2_2_57:notes"/>
           <p:cNvSpPr txBox="1"/>
           <p:nvPr>
             <p:ph idx="12" type="sldNum"/>
@@ -1803,7 +1803,7 @@
   <p:cSld>
     <p:spTree>
       <p:nvGrpSpPr>
-        <p:cNvPr id="140" name="Shape 140"/>
+        <p:cNvPr id="138" name="Shape 138"/>
         <p:cNvGrpSpPr/>
         <p:nvPr/>
       </p:nvGrpSpPr>
@@ -1817,7 +1817,7 @@
       </p:grpSpPr>
       <p:sp>
         <p:nvSpPr>
-          <p:cNvPr id="141" name="Google Shape;141;g3f5a7760ed2_2_90:notes"/>
+          <p:cNvPr id="139" name="Google Shape;139;g3f5a7760ed2_2_90:notes"/>
           <p:cNvSpPr/>
           <p:nvPr>
             <p:ph idx="2" type="sldImg"/>
@@ -1862,7 +1862,7 @@
       </p:sp>
       <p:sp>
         <p:nvSpPr>
-          <p:cNvPr id="142" name="Google Shape;142;g3f5a7760ed2_2_90:notes"/>
+          <p:cNvPr id="140" name="Google Shape;140;g3f5a7760ed2_2_90:notes"/>
           <p:cNvSpPr txBox="1"/>
           <p:nvPr>
             <p:ph idx="1" type="body"/>
@@ -1905,7 +1905,7 @@
       </p:sp>
       <p:sp>
         <p:nvSpPr>
-          <p:cNvPr id="143" name="Google Shape;143;g3f5a7760ed2_2_90:notes"/>
+          <p:cNvPr id="141" name="Google Shape;141;g3f5a7760ed2_2_90:notes"/>
           <p:cNvSpPr txBox="1"/>
           <p:nvPr>
             <p:ph idx="12" type="sldNum"/>
@@ -1960,7 +1960,7 @@
   <p:cSld>
     <p:spTree>
       <p:nvGrpSpPr>
-        <p:cNvPr id="176" name="Shape 176"/>
+        <p:cNvPr id="174" name="Shape 174"/>
         <p:cNvGrpSpPr/>
         <p:nvPr/>
       </p:nvGrpSpPr>
@@ -1974,7 +1974,7 @@
       </p:grpSpPr>
       <p:sp>
         <p:nvSpPr>
-          <p:cNvPr id="177" name="Google Shape;177;g3f5a7760ed2_2_125:notes"/>
+          <p:cNvPr id="175" name="Google Shape;175;g3f5a7760ed2_2_125:notes"/>
           <p:cNvSpPr/>
           <p:nvPr>
             <p:ph idx="2" type="sldImg"/>
@@ -2019,7 +2019,7 @@
       </p:sp>
       <p:sp>
         <p:nvSpPr>
-          <p:cNvPr id="178" name="Google Shape;178;g3f5a7760ed2_2_125:notes"/>
+          <p:cNvPr id="176" name="Google Shape;176;g3f5a7760ed2_2_125:notes"/>
           <p:cNvSpPr txBox="1"/>
           <p:nvPr>
             <p:ph idx="1" type="body"/>
@@ -2062,7 +2062,7 @@
       </p:sp>
       <p:sp>
         <p:nvSpPr>
-          <p:cNvPr id="179" name="Google Shape;179;g3f5a7760ed2_2_125:notes"/>
+          <p:cNvPr id="177" name="Google Shape;177;g3f5a7760ed2_2_125:notes"/>
           <p:cNvSpPr txBox="1"/>
           <p:nvPr>
             <p:ph idx="12" type="sldNum"/>
@@ -2117,7 +2117,7 @@
   <p:cSld>
     <p:spTree>
       <p:nvGrpSpPr>
-        <p:cNvPr id="213" name="Shape 213"/>
+        <p:cNvPr id="211" name="Shape 211"/>
         <p:cNvGrpSpPr/>
         <p:nvPr/>
       </p:nvGrpSpPr>
@@ -2131,7 +2131,7 @@
       </p:grpSpPr>
       <p:sp>
         <p:nvSpPr>
-          <p:cNvPr id="214" name="Google Shape;214;g3f5a7760ed2_2_161:notes"/>
+          <p:cNvPr id="212" name="Google Shape;212;g3f5a7760ed2_2_161:notes"/>
           <p:cNvSpPr/>
           <p:nvPr>
             <p:ph idx="2" type="sldImg"/>
@@ -2176,7 +2176,7 @@
       </p:sp>
       <p:sp>
         <p:nvSpPr>
-          <p:cNvPr id="215" name="Google Shape;215;g3f5a7760ed2_2_161:notes"/>
+          <p:cNvPr id="213" name="Google Shape;213;g3f5a7760ed2_2_161:notes"/>
           <p:cNvSpPr txBox="1"/>
           <p:nvPr>
             <p:ph idx="1" type="body"/>
@@ -2219,7 +2219,7 @@
       </p:sp>
       <p:sp>
         <p:nvSpPr>
-          <p:cNvPr id="216" name="Google Shape;216;g3f5a7760ed2_2_161:notes"/>
+          <p:cNvPr id="214" name="Google Shape;214;g3f5a7760ed2_2_161:notes"/>
           <p:cNvSpPr txBox="1"/>
           <p:nvPr>
             <p:ph idx="12" type="sldNum"/>
@@ -2274,7 +2274,7 @@
   <p:cSld>
     <p:spTree>
       <p:nvGrpSpPr>
-        <p:cNvPr id="234" name="Shape 234"/>
+        <p:cNvPr id="232" name="Shape 232"/>
         <p:cNvGrpSpPr/>
         <p:nvPr/>
       </p:nvGrpSpPr>
@@ -2288,7 +2288,7 @@
       </p:grpSpPr>
       <p:sp>
         <p:nvSpPr>
-          <p:cNvPr id="235" name="Google Shape;235;g3f5a7760ed2_2_181:notes"/>
+          <p:cNvPr id="233" name="Google Shape;233;g3f5a7760ed2_2_181:notes"/>
           <p:cNvSpPr/>
           <p:nvPr>
             <p:ph idx="2" type="sldImg"/>
@@ -2333,7 +2333,7 @@
       </p:sp>
       <p:sp>
         <p:nvSpPr>
-          <p:cNvPr id="236" name="Google Shape;236;g3f5a7760ed2_2_181:notes"/>
+          <p:cNvPr id="234" name="Google Shape;234;g3f5a7760ed2_2_181:notes"/>
           <p:cNvSpPr txBox="1"/>
           <p:nvPr>
             <p:ph idx="1" type="body"/>
@@ -2376,7 +2376,7 @@
       </p:sp>
       <p:sp>
         <p:nvSpPr>
-          <p:cNvPr id="237" name="Google Shape;237;g3f5a7760ed2_2_181:notes"/>
+          <p:cNvPr id="235" name="Google Shape;235;g3f5a7760ed2_2_181:notes"/>
           <p:cNvSpPr txBox="1"/>
           <p:nvPr>
             <p:ph idx="12" type="sldNum"/>
@@ -2431,7 +2431,7 @@
   <p:cSld>
     <p:spTree>
       <p:nvGrpSpPr>
-        <p:cNvPr id="260" name="Shape 260"/>
+        <p:cNvPr id="258" name="Shape 258"/>
         <p:cNvGrpSpPr/>
         <p:nvPr/>
       </p:nvGrpSpPr>
@@ -2445,7 +2445,7 @@
       </p:grpSpPr>
       <p:sp>
         <p:nvSpPr>
-          <p:cNvPr id="261" name="Google Shape;261;g3f5a7760ed2_0_0:notes"/>
+          <p:cNvPr id="259" name="Google Shape;259;g3f5a7760ed2_0_0:notes"/>
           <p:cNvSpPr/>
           <p:nvPr>
             <p:ph idx="2" type="sldImg"/>
@@ -2490,7 +2490,7 @@
       </p:sp>
       <p:sp>
         <p:nvSpPr>
-          <p:cNvPr id="262" name="Google Shape;262;g3f5a7760ed2_0_0:notes"/>
+          <p:cNvPr id="260" name="Google Shape;260;g3f5a7760ed2_0_0:notes"/>
           <p:cNvSpPr txBox="1"/>
           <p:nvPr>
             <p:ph idx="1" type="body"/>
@@ -2533,7 +2533,7 @@
       </p:sp>
       <p:sp>
         <p:nvSpPr>
-          <p:cNvPr id="263" name="Google Shape;263;g3f5a7760ed2_0_0:notes"/>
+          <p:cNvPr id="261" name="Google Shape;261;g3f5a7760ed2_0_0:notes"/>
           <p:cNvSpPr txBox="1"/>
           <p:nvPr>
             <p:ph idx="12" type="sldNum"/>
@@ -2588,7 +2588,7 @@
   <p:cSld>
     <p:spTree>
       <p:nvGrpSpPr>
-        <p:cNvPr id="271" name="Shape 271"/>
+        <p:cNvPr id="270" name="Shape 270"/>
         <p:cNvGrpSpPr/>
         <p:nvPr/>
       </p:nvGrpSpPr>
@@ -2602,7 +2602,7 @@
       </p:grpSpPr>
       <p:sp>
         <p:nvSpPr>
-          <p:cNvPr id="272" name="Google Shape;272;g3f5a7760ed2_2_206:notes"/>
+          <p:cNvPr id="271" name="Google Shape;271;g3f5a7760ed2_2_206:notes"/>
           <p:cNvSpPr/>
           <p:nvPr>
             <p:ph idx="2" type="sldImg"/>
@@ -2647,7 +2647,7 @@
       </p:sp>
       <p:sp>
         <p:nvSpPr>
-          <p:cNvPr id="273" name="Google Shape;273;g3f5a7760ed2_2_206:notes"/>
+          <p:cNvPr id="272" name="Google Shape;272;g3f5a7760ed2_2_206:notes"/>
           <p:cNvSpPr txBox="1"/>
           <p:nvPr>
             <p:ph idx="1" type="body"/>
@@ -2690,7 +2690,7 @@
       </p:sp>
       <p:sp>
         <p:nvSpPr>
-          <p:cNvPr id="274" name="Google Shape;274;g3f5a7760ed2_2_206:notes"/>
+          <p:cNvPr id="273" name="Google Shape;273;g3f5a7760ed2_2_206:notes"/>
           <p:cNvSpPr txBox="1"/>
           <p:nvPr>
             <p:ph idx="12" type="sldNum"/>
@@ -8385,114 +8385,6 @@
         </p:nvSpPr>
         <p:spPr>
           <a:xfrm>
-            <a:off x="480060" y="925830"/>
-            <a:ext cx="1495044" cy="260604"/>
-          </a:xfrm>
-          <a:prstGeom prst="roundRect">
-            <a:avLst>
-              <a:gd fmla="val 50000" name="adj"/>
-            </a:avLst>
-          </a:prstGeom>
-          <a:solidFill>
-            <a:srgbClr val="00C2E0"/>
-          </a:solidFill>
-          <a:ln>
-            <a:noFill/>
-          </a:ln>
-        </p:spPr>
-        <p:txBody>
-          <a:bodyPr anchorCtr="0" anchor="ctr" bIns="68575" lIns="68575" spcFirstLastPara="1" rIns="68575" wrap="square" tIns="68575">
-            <a:noAutofit/>
-          </a:bodyPr>
-          <a:lstStyle/>
-          <a:p>
-            <a:pPr indent="0" lvl="0" marL="0" rtl="0" algn="l">
-              <a:spcBef>
-                <a:spcPts val="0"/>
-              </a:spcBef>
-              <a:spcAft>
-                <a:spcPts val="0"/>
-              </a:spcAft>
-              <a:buNone/>
-            </a:pPr>
-            <a:r>
-              <a:t/>
-            </a:r>
-            <a:endParaRPr/>
-          </a:p>
-        </p:txBody>
-      </p:sp>
-      <p:sp>
-        <p:nvSpPr>
-          <p:cNvPr id="63" name="Google Shape;63;p15"/>
-          <p:cNvSpPr/>
-          <p:nvPr/>
-        </p:nvSpPr>
-        <p:spPr>
-          <a:xfrm>
-            <a:off x="480060" y="925830"/>
-            <a:ext cx="1495044" cy="260604"/>
-          </a:xfrm>
-          <a:prstGeom prst="rect">
-            <a:avLst/>
-          </a:prstGeom>
-          <a:noFill/>
-          <a:ln>
-            <a:noFill/>
-          </a:ln>
-        </p:spPr>
-        <p:txBody>
-          <a:bodyPr anchorCtr="0" anchor="ctr" bIns="34275" lIns="68575" spcFirstLastPara="1" rIns="68575" wrap="square" tIns="34275">
-            <a:noAutofit/>
-          </a:bodyPr>
-          <a:lstStyle/>
-          <a:p>
-            <a:pPr indent="0" lvl="0" marL="0" marR="0" rtl="0" algn="ctr">
-              <a:spcBef>
-                <a:spcPts val="0"/>
-              </a:spcBef>
-              <a:spcAft>
-                <a:spcPts val="0"/>
-              </a:spcAft>
-              <a:buClr>
-                <a:srgbClr val="FFFFFF"/>
-              </a:buClr>
-              <a:buSzPts val="900"/>
-              <a:buFont typeface="Calibri"/>
-              <a:buNone/>
-            </a:pPr>
-            <a:r>
-              <a:rPr b="1" i="0" lang="ja" sz="900" u="none" cap="none" strike="noStrike">
-                <a:solidFill>
-                  <a:srgbClr val="FFFFFF"/>
-                </a:solidFill>
-                <a:latin typeface="Calibri"/>
-                <a:ea typeface="Calibri"/>
-                <a:cs typeface="Calibri"/>
-                <a:sym typeface="Calibri"/>
-              </a:rPr>
-              <a:t>ハッカソン 1日目 1限</a:t>
-            </a:r>
-            <a:endParaRPr b="0" i="0" sz="900" u="none" cap="none" strike="noStrike">
-              <a:solidFill>
-                <a:schemeClr val="dk1"/>
-              </a:solidFill>
-              <a:latin typeface="Calibri"/>
-              <a:ea typeface="Calibri"/>
-              <a:cs typeface="Calibri"/>
-              <a:sym typeface="Calibri"/>
-            </a:endParaRPr>
-          </a:p>
-        </p:txBody>
-      </p:sp>
-      <p:sp>
-        <p:nvSpPr>
-          <p:cNvPr id="64" name="Google Shape;64;p15"/>
-          <p:cNvSpPr/>
-          <p:nvPr/>
-        </p:nvSpPr>
-        <p:spPr>
-          <a:xfrm>
             <a:off x="445770" y="1783080"/>
             <a:ext cx="7886700" cy="1028700"/>
           </a:xfrm>
@@ -8550,7 +8442,7 @@
       </p:sp>
       <p:sp>
         <p:nvSpPr>
-          <p:cNvPr id="65" name="Google Shape;65;p15"/>
+          <p:cNvPr id="63" name="Google Shape;63;p15"/>
           <p:cNvSpPr/>
           <p:nvPr/>
         </p:nvSpPr>
@@ -8588,7 +8480,7 @@
               <a:buNone/>
             </a:pPr>
             <a:r>
-              <a:rPr b="0" i="0" lang="ja" sz="1500" u="none" cap="none" strike="noStrike">
+              <a:rPr lang="ja" sz="1500">
                 <a:solidFill>
                   <a:srgbClr val="CFC9EE"/>
                 </a:solidFill>
@@ -8597,7 +8489,7 @@
                 <a:cs typeface="Calibri"/>
                 <a:sym typeface="Calibri"/>
               </a:rPr>
-              <a:t>開会式オリエンテーション　導入資料</a:t>
+              <a:t>IICA夏季メタバース集中講義</a:t>
             </a:r>
             <a:endParaRPr b="0" i="0" sz="1500" u="none" cap="none" strike="noStrike">
               <a:solidFill>
@@ -8613,7 +8505,7 @@
       </p:sp>
       <p:sp>
         <p:nvSpPr>
-          <p:cNvPr id="66" name="Google Shape;66;p15"/>
+          <p:cNvPr id="64" name="Google Shape;64;p15"/>
           <p:cNvSpPr/>
           <p:nvPr/>
         </p:nvSpPr>
@@ -8656,7 +8548,7 @@
       </p:sp>
       <p:pic>
         <p:nvPicPr>
-          <p:cNvPr descr="/home/claude/metaverse_deck/icons/cube_3d_white.png" id="67" name="Google Shape;67;p15"/>
+          <p:cNvPr descr="/home/claude/metaverse_deck/icons/cube_3d_white.png" id="65" name="Google Shape;65;p15"/>
           <p:cNvPicPr preferRelativeResize="0"/>
           <p:nvPr/>
         </p:nvPicPr>
@@ -8683,7 +8575,7 @@
       </p:pic>
       <p:sp>
         <p:nvSpPr>
-          <p:cNvPr id="68" name="Google Shape;68;p15"/>
+          <p:cNvPr id="66" name="Google Shape;66;p15"/>
           <p:cNvSpPr/>
           <p:nvPr/>
         </p:nvSpPr>
@@ -8746,7 +8638,7 @@
       </p:sp>
       <p:sp>
         <p:nvSpPr>
-          <p:cNvPr id="69" name="Google Shape;69;p15"/>
+          <p:cNvPr id="67" name="Google Shape;67;p15"/>
           <p:cNvSpPr/>
           <p:nvPr/>
         </p:nvSpPr>
@@ -8820,7 +8712,7 @@
   <p:cSld>
     <p:spTree>
       <p:nvGrpSpPr>
-        <p:cNvPr id="318" name="Shape 318"/>
+        <p:cNvPr id="317" name="Shape 317"/>
         <p:cNvGrpSpPr/>
         <p:nvPr/>
       </p:nvGrpSpPr>
@@ -8834,7 +8726,7 @@
       </p:grpSpPr>
       <p:sp>
         <p:nvSpPr>
-          <p:cNvPr id="319" name="Google Shape;319;p24"/>
+          <p:cNvPr id="318" name="Google Shape;318;p24"/>
           <p:cNvSpPr/>
           <p:nvPr/>
         </p:nvSpPr>
@@ -8877,7 +8769,7 @@
       </p:sp>
       <p:sp>
         <p:nvSpPr>
-          <p:cNvPr id="320" name="Google Shape;320;p24"/>
+          <p:cNvPr id="319" name="Google Shape;319;p24"/>
           <p:cNvSpPr/>
           <p:nvPr/>
         </p:nvSpPr>
@@ -8922,7 +8814,7 @@
       </p:sp>
       <p:sp>
         <p:nvSpPr>
-          <p:cNvPr id="321" name="Google Shape;321;p24"/>
+          <p:cNvPr id="320" name="Google Shape;320;p24"/>
           <p:cNvSpPr/>
           <p:nvPr/>
         </p:nvSpPr>
@@ -8985,7 +8877,7 @@
       </p:sp>
       <p:sp>
         <p:nvSpPr>
-          <p:cNvPr id="322" name="Google Shape;322;p24"/>
+          <p:cNvPr id="321" name="Google Shape;321;p24"/>
           <p:cNvSpPr/>
           <p:nvPr/>
         </p:nvSpPr>
@@ -9048,7 +8940,7 @@
       </p:sp>
       <p:sp>
         <p:nvSpPr>
-          <p:cNvPr id="323" name="Google Shape;323;p24"/>
+          <p:cNvPr id="322" name="Google Shape;322;p24"/>
           <p:cNvSpPr/>
           <p:nvPr/>
         </p:nvSpPr>
@@ -9111,7 +9003,7 @@
       </p:sp>
       <p:graphicFrame>
         <p:nvGraphicFramePr>
-          <p:cNvPr id="324" name="Google Shape;324;p24"/>
+          <p:cNvPr id="323" name="Google Shape;323;p24"/>
           <p:cNvGraphicFramePr/>
           <p:nvPr/>
         </p:nvGraphicFramePr>
@@ -9124,7 +9016,7 @@
             <a:tbl>
               <a:tblPr>
                 <a:noFill/>
-                <a:tableStyleId>{B8D73487-4B9A-4EB3-AE3C-88ED599BB840}</a:tableStyleId>
+                <a:tableStyleId>{1B85D6DC-6274-489A-A74C-3609BF297A02}</a:tableStyleId>
               </a:tblPr>
               <a:tblGrid>
                 <a:gridCol w="2125975"/>
@@ -9956,7 +9848,7 @@
       </p:graphicFrame>
       <p:sp>
         <p:nvSpPr>
-          <p:cNvPr id="325" name="Google Shape;325;p24"/>
+          <p:cNvPr id="324" name="Google Shape;324;p24"/>
           <p:cNvSpPr/>
           <p:nvPr/>
         </p:nvSpPr>
@@ -10001,7 +9893,7 @@
       </p:sp>
       <p:sp>
         <p:nvSpPr>
-          <p:cNvPr id="326" name="Google Shape;326;p24"/>
+          <p:cNvPr id="325" name="Google Shape;325;p24"/>
           <p:cNvSpPr/>
           <p:nvPr/>
         </p:nvSpPr>
@@ -10044,7 +9936,7 @@
       </p:sp>
       <p:pic>
         <p:nvPicPr>
-          <p:cNvPr descr="/home/claude/metaverse_deck/icons/clipboard_white.png" id="327" name="Google Shape;327;p24"/>
+          <p:cNvPr descr="/home/claude/metaverse_deck/icons/clipboard_white.png" id="326" name="Google Shape;326;p24"/>
           <p:cNvPicPr preferRelativeResize="0"/>
           <p:nvPr/>
         </p:nvPicPr>
@@ -10071,7 +9963,7 @@
       </p:pic>
       <p:sp>
         <p:nvSpPr>
-          <p:cNvPr id="328" name="Google Shape;328;p24"/>
+          <p:cNvPr id="327" name="Google Shape;327;p24"/>
           <p:cNvSpPr/>
           <p:nvPr/>
         </p:nvSpPr>
@@ -10134,7 +10026,7 @@
       </p:sp>
       <p:sp>
         <p:nvSpPr>
-          <p:cNvPr id="329" name="Google Shape;329;p24"/>
+          <p:cNvPr id="328" name="Google Shape;328;p24"/>
           <p:cNvSpPr/>
           <p:nvPr/>
         </p:nvSpPr>
@@ -10200,7 +10092,7 @@
       </p:sp>
       <p:sp>
         <p:nvSpPr>
-          <p:cNvPr id="330" name="Google Shape;330;p24"/>
+          <p:cNvPr id="329" name="Google Shape;329;p24"/>
           <p:cNvSpPr/>
           <p:nvPr/>
         </p:nvSpPr>
@@ -10245,7 +10137,7 @@
       </p:sp>
       <p:sp>
         <p:nvSpPr>
-          <p:cNvPr id="331" name="Google Shape;331;p24"/>
+          <p:cNvPr id="330" name="Google Shape;330;p24"/>
           <p:cNvSpPr/>
           <p:nvPr/>
         </p:nvSpPr>
@@ -10308,7 +10200,7 @@
       </p:sp>
       <p:sp>
         <p:nvSpPr>
-          <p:cNvPr id="332" name="Google Shape;332;p24"/>
+          <p:cNvPr id="331" name="Google Shape;331;p24"/>
           <p:cNvSpPr/>
           <p:nvPr/>
         </p:nvSpPr>
@@ -10371,7 +10263,7 @@
       </p:sp>
       <p:sp>
         <p:nvSpPr>
-          <p:cNvPr id="333" name="Google Shape;333;p24"/>
+          <p:cNvPr id="332" name="Google Shape;332;p24"/>
           <p:cNvSpPr/>
           <p:nvPr/>
         </p:nvSpPr>
@@ -10445,7 +10337,7 @@
   <p:cSld>
     <p:spTree>
       <p:nvGrpSpPr>
-        <p:cNvPr id="338" name="Shape 338"/>
+        <p:cNvPr id="337" name="Shape 337"/>
         <p:cNvGrpSpPr/>
         <p:nvPr/>
       </p:nvGrpSpPr>
@@ -10459,7 +10351,7 @@
       </p:grpSpPr>
       <p:sp>
         <p:nvSpPr>
-          <p:cNvPr id="339" name="Google Shape;339;p25"/>
+          <p:cNvPr id="338" name="Google Shape;338;p25"/>
           <p:cNvSpPr/>
           <p:nvPr/>
         </p:nvSpPr>
@@ -10502,7 +10394,7 @@
       </p:sp>
       <p:sp>
         <p:nvSpPr>
-          <p:cNvPr id="340" name="Google Shape;340;p25"/>
+          <p:cNvPr id="339" name="Google Shape;339;p25"/>
           <p:cNvSpPr/>
           <p:nvPr/>
         </p:nvSpPr>
@@ -10547,7 +10439,7 @@
       </p:sp>
       <p:sp>
         <p:nvSpPr>
-          <p:cNvPr id="341" name="Google Shape;341;p25"/>
+          <p:cNvPr id="340" name="Google Shape;340;p25"/>
           <p:cNvSpPr/>
           <p:nvPr/>
         </p:nvSpPr>
@@ -10592,7 +10484,7 @@
       </p:sp>
       <p:sp>
         <p:nvSpPr>
-          <p:cNvPr id="342" name="Google Shape;342;p25"/>
+          <p:cNvPr id="341" name="Google Shape;341;p25"/>
           <p:cNvSpPr/>
           <p:nvPr/>
         </p:nvSpPr>
@@ -10637,7 +10529,7 @@
       </p:sp>
       <p:sp>
         <p:nvSpPr>
-          <p:cNvPr id="343" name="Google Shape;343;p25"/>
+          <p:cNvPr id="342" name="Google Shape;342;p25"/>
           <p:cNvSpPr/>
           <p:nvPr/>
         </p:nvSpPr>
@@ -10700,7 +10592,7 @@
       </p:sp>
       <p:sp>
         <p:nvSpPr>
-          <p:cNvPr id="344" name="Google Shape;344;p25"/>
+          <p:cNvPr id="343" name="Google Shape;343;p25"/>
           <p:cNvSpPr/>
           <p:nvPr/>
         </p:nvSpPr>
@@ -10763,7 +10655,7 @@
       </p:sp>
       <p:sp>
         <p:nvSpPr>
-          <p:cNvPr id="345" name="Google Shape;345;p25"/>
+          <p:cNvPr id="344" name="Google Shape;344;p25"/>
           <p:cNvSpPr/>
           <p:nvPr/>
         </p:nvSpPr>
@@ -10826,7 +10718,7 @@
       </p:sp>
       <p:sp>
         <p:nvSpPr>
-          <p:cNvPr id="346" name="Google Shape;346;p25"/>
+          <p:cNvPr id="345" name="Google Shape;345;p25"/>
           <p:cNvSpPr/>
           <p:nvPr/>
         </p:nvSpPr>
@@ -10972,7 +10864,7 @@
       </p:sp>
       <p:sp>
         <p:nvSpPr>
-          <p:cNvPr id="347" name="Google Shape;347;p25"/>
+          <p:cNvPr id="346" name="Google Shape;346;p25"/>
           <p:cNvSpPr/>
           <p:nvPr/>
         </p:nvSpPr>
@@ -11015,7 +10907,7 @@
       </p:sp>
       <p:pic>
         <p:nvPicPr>
-          <p:cNvPr descr="/home/claude/metaverse_deck/icons/balance_scale_white.png" id="348" name="Google Shape;348;p25"/>
+          <p:cNvPr descr="/home/claude/metaverse_deck/icons/balance_scale_white.png" id="347" name="Google Shape;347;p25"/>
           <p:cNvPicPr preferRelativeResize="0"/>
           <p:nvPr/>
         </p:nvPicPr>
@@ -11042,7 +10934,7 @@
       </p:pic>
       <p:sp>
         <p:nvSpPr>
-          <p:cNvPr id="349" name="Google Shape;349;p25"/>
+          <p:cNvPr id="348" name="Google Shape;348;p25"/>
           <p:cNvSpPr/>
           <p:nvPr/>
         </p:nvSpPr>
@@ -11093,7 +10985,7 @@
       </p:sp>
       <p:sp>
         <p:nvSpPr>
-          <p:cNvPr id="350" name="Google Shape;350;p25"/>
+          <p:cNvPr id="349" name="Google Shape;349;p25"/>
           <p:cNvSpPr/>
           <p:nvPr/>
         </p:nvSpPr>
@@ -11156,7 +11048,7 @@
       </p:sp>
       <p:sp>
         <p:nvSpPr>
-          <p:cNvPr id="351" name="Google Shape;351;p25"/>
+          <p:cNvPr id="350" name="Google Shape;350;p25"/>
           <p:cNvSpPr/>
           <p:nvPr/>
         </p:nvSpPr>
@@ -11222,7 +11114,7 @@
       </p:sp>
       <p:sp>
         <p:nvSpPr>
-          <p:cNvPr id="352" name="Google Shape;352;p25"/>
+          <p:cNvPr id="351" name="Google Shape;351;p25"/>
           <p:cNvSpPr/>
           <p:nvPr/>
         </p:nvSpPr>
@@ -11275,7 +11167,7 @@
       </p:sp>
       <p:sp>
         <p:nvSpPr>
-          <p:cNvPr id="353" name="Google Shape;353;p25"/>
+          <p:cNvPr id="352" name="Google Shape;352;p25"/>
           <p:cNvSpPr/>
           <p:nvPr/>
         </p:nvSpPr>
@@ -11350,7 +11242,7 @@
       </p:sp>
       <p:sp>
         <p:nvSpPr>
-          <p:cNvPr id="354" name="Google Shape;354;p25"/>
+          <p:cNvPr id="353" name="Google Shape;353;p25"/>
           <p:cNvSpPr/>
           <p:nvPr/>
         </p:nvSpPr>
@@ -11413,7 +11305,7 @@
       </p:sp>
       <p:sp>
         <p:nvSpPr>
-          <p:cNvPr id="355" name="Google Shape;355;p25"/>
+          <p:cNvPr id="354" name="Google Shape;354;p25"/>
           <p:cNvSpPr/>
           <p:nvPr/>
         </p:nvSpPr>
@@ -11487,7 +11379,7 @@
   <p:cSld>
     <p:spTree>
       <p:nvGrpSpPr>
-        <p:cNvPr id="360" name="Shape 360"/>
+        <p:cNvPr id="359" name="Shape 359"/>
         <p:cNvGrpSpPr/>
         <p:nvPr/>
       </p:nvGrpSpPr>
@@ -11501,7 +11393,7 @@
       </p:grpSpPr>
       <p:sp>
         <p:nvSpPr>
-          <p:cNvPr id="361" name="Google Shape;361;p26"/>
+          <p:cNvPr id="360" name="Google Shape;360;p26"/>
           <p:cNvSpPr/>
           <p:nvPr/>
         </p:nvSpPr>
@@ -11544,7 +11436,7 @@
       </p:sp>
       <p:sp>
         <p:nvSpPr>
-          <p:cNvPr id="362" name="Google Shape;362;p26"/>
+          <p:cNvPr id="361" name="Google Shape;361;p26"/>
           <p:cNvSpPr/>
           <p:nvPr/>
         </p:nvSpPr>
@@ -11589,7 +11481,7 @@
       </p:sp>
       <p:sp>
         <p:nvSpPr>
-          <p:cNvPr id="363" name="Google Shape;363;p26"/>
+          <p:cNvPr id="362" name="Google Shape;362;p26"/>
           <p:cNvSpPr/>
           <p:nvPr/>
         </p:nvSpPr>
@@ -11634,7 +11526,7 @@
       </p:sp>
       <p:sp>
         <p:nvSpPr>
-          <p:cNvPr id="364" name="Google Shape;364;p26"/>
+          <p:cNvPr id="363" name="Google Shape;363;p26"/>
           <p:cNvSpPr/>
           <p:nvPr/>
         </p:nvSpPr>
@@ -11679,7 +11571,7 @@
       </p:sp>
       <p:sp>
         <p:nvSpPr>
-          <p:cNvPr id="365" name="Google Shape;365;p26"/>
+          <p:cNvPr id="364" name="Google Shape;364;p26"/>
           <p:cNvSpPr/>
           <p:nvPr/>
         </p:nvSpPr>
@@ -11724,7 +11616,7 @@
       </p:sp>
       <p:sp>
         <p:nvSpPr>
-          <p:cNvPr id="366" name="Google Shape;366;p26"/>
+          <p:cNvPr id="365" name="Google Shape;365;p26"/>
           <p:cNvSpPr/>
           <p:nvPr/>
         </p:nvSpPr>
@@ -11787,7 +11679,7 @@
       </p:sp>
       <p:sp>
         <p:nvSpPr>
-          <p:cNvPr id="367" name="Google Shape;367;p26"/>
+          <p:cNvPr id="366" name="Google Shape;366;p26"/>
           <p:cNvSpPr/>
           <p:nvPr/>
         </p:nvSpPr>
@@ -11886,7 +11778,7 @@
       </p:sp>
       <p:sp>
         <p:nvSpPr>
-          <p:cNvPr id="368" name="Google Shape;368;p26"/>
+          <p:cNvPr id="367" name="Google Shape;367;p26"/>
           <p:cNvSpPr/>
           <p:nvPr/>
         </p:nvSpPr>
@@ -11949,7 +11841,7 @@
       </p:sp>
       <p:sp>
         <p:nvSpPr>
-          <p:cNvPr id="369" name="Google Shape;369;p26"/>
+          <p:cNvPr id="368" name="Google Shape;368;p26"/>
           <p:cNvSpPr/>
           <p:nvPr/>
         </p:nvSpPr>
@@ -12000,7 +11892,7 @@
       </p:sp>
       <p:sp>
         <p:nvSpPr>
-          <p:cNvPr id="370" name="Google Shape;370;p26"/>
+          <p:cNvPr id="369" name="Google Shape;369;p26"/>
           <p:cNvSpPr/>
           <p:nvPr/>
         </p:nvSpPr>
@@ -12045,7 +11937,7 @@
       </p:sp>
       <p:sp>
         <p:nvSpPr>
-          <p:cNvPr id="371" name="Google Shape;371;p26"/>
+          <p:cNvPr id="370" name="Google Shape;370;p26"/>
           <p:cNvSpPr/>
           <p:nvPr/>
         </p:nvSpPr>
@@ -12108,7 +12000,7 @@
       </p:sp>
       <p:sp>
         <p:nvSpPr>
-          <p:cNvPr id="372" name="Google Shape;372;p26"/>
+          <p:cNvPr id="371" name="Google Shape;371;p26"/>
           <p:cNvSpPr/>
           <p:nvPr/>
         </p:nvSpPr>
@@ -12254,7 +12146,7 @@
       </p:sp>
       <p:sp>
         <p:nvSpPr>
-          <p:cNvPr id="373" name="Google Shape;373;p26"/>
+          <p:cNvPr id="372" name="Google Shape;372;p26"/>
           <p:cNvSpPr/>
           <p:nvPr/>
         </p:nvSpPr>
@@ -12297,7 +12189,7 @@
       </p:sp>
       <p:pic>
         <p:nvPicPr>
-          <p:cNvPr descr="/home/claude/metaverse_deck/icons/avatar_white.png" id="374" name="Google Shape;374;p26"/>
+          <p:cNvPr descr="/home/claude/metaverse_deck/icons/avatar_white.png" id="373" name="Google Shape;373;p26"/>
           <p:cNvPicPr preferRelativeResize="0"/>
           <p:nvPr/>
         </p:nvPicPr>
@@ -12324,7 +12216,7 @@
       </p:pic>
       <p:sp>
         <p:nvSpPr>
-          <p:cNvPr id="375" name="Google Shape;375;p26"/>
+          <p:cNvPr id="374" name="Google Shape;374;p26"/>
           <p:cNvSpPr/>
           <p:nvPr/>
         </p:nvSpPr>
@@ -12387,7 +12279,7 @@
       </p:sp>
       <p:sp>
         <p:nvSpPr>
-          <p:cNvPr id="376" name="Google Shape;376;p26"/>
+          <p:cNvPr id="375" name="Google Shape;375;p26"/>
           <p:cNvSpPr/>
           <p:nvPr/>
         </p:nvSpPr>
@@ -12432,7 +12324,7 @@
       </p:sp>
       <p:sp>
         <p:nvSpPr>
-          <p:cNvPr id="377" name="Google Shape;377;p26"/>
+          <p:cNvPr id="376" name="Google Shape;376;p26"/>
           <p:cNvSpPr/>
           <p:nvPr/>
         </p:nvSpPr>
@@ -12495,7 +12387,7 @@
       </p:sp>
       <p:sp>
         <p:nvSpPr>
-          <p:cNvPr id="378" name="Google Shape;378;p26"/>
+          <p:cNvPr id="377" name="Google Shape;377;p26"/>
           <p:cNvSpPr/>
           <p:nvPr/>
         </p:nvSpPr>
@@ -12540,7 +12432,7 @@
       </p:sp>
       <p:pic>
         <p:nvPicPr>
-          <p:cNvPr descr="/home/claude/metaverse_deck/icons/qr_code.png" id="379" name="Google Shape;379;p26"/>
+          <p:cNvPr descr="/home/claude/metaverse_deck/icons/qr_code.png" id="378" name="Google Shape;378;p26"/>
           <p:cNvPicPr preferRelativeResize="0"/>
           <p:nvPr/>
         </p:nvPicPr>
@@ -12567,7 +12459,7 @@
       </p:pic>
       <p:sp>
         <p:nvSpPr>
-          <p:cNvPr id="380" name="Google Shape;380;p26"/>
+          <p:cNvPr id="379" name="Google Shape;379;p26"/>
           <p:cNvSpPr/>
           <p:nvPr/>
         </p:nvSpPr>
@@ -12630,7 +12522,7 @@
       </p:sp>
       <p:sp>
         <p:nvSpPr>
-          <p:cNvPr id="381" name="Google Shape;381;p26"/>
+          <p:cNvPr id="380" name="Google Shape;380;p26"/>
           <p:cNvSpPr/>
           <p:nvPr/>
         </p:nvSpPr>
@@ -12693,7 +12585,7 @@
       </p:sp>
       <p:sp>
         <p:nvSpPr>
-          <p:cNvPr id="382" name="Google Shape;382;p26"/>
+          <p:cNvPr id="381" name="Google Shape;381;p26"/>
           <p:cNvSpPr/>
           <p:nvPr/>
         </p:nvSpPr>
@@ -12756,7 +12648,7 @@
       </p:sp>
       <p:sp>
         <p:nvSpPr>
-          <p:cNvPr id="383" name="Google Shape;383;p26"/>
+          <p:cNvPr id="382" name="Google Shape;382;p26"/>
           <p:cNvSpPr/>
           <p:nvPr/>
         </p:nvSpPr>
@@ -12830,7 +12722,7 @@
   <p:cSld>
     <p:spTree>
       <p:nvGrpSpPr>
-        <p:cNvPr id="388" name="Shape 388"/>
+        <p:cNvPr id="387" name="Shape 387"/>
         <p:cNvGrpSpPr/>
         <p:nvPr/>
       </p:nvGrpSpPr>
@@ -12844,7 +12736,7 @@
       </p:grpSpPr>
       <p:sp>
         <p:nvSpPr>
-          <p:cNvPr id="389" name="Google Shape;389;p27"/>
+          <p:cNvPr id="388" name="Google Shape;388;p27"/>
           <p:cNvSpPr/>
           <p:nvPr/>
         </p:nvSpPr>
@@ -12887,7 +12779,7 @@
       </p:sp>
       <p:sp>
         <p:nvSpPr>
-          <p:cNvPr id="390" name="Google Shape;390;p27"/>
+          <p:cNvPr id="389" name="Google Shape;389;p27"/>
           <p:cNvSpPr/>
           <p:nvPr/>
         </p:nvSpPr>
@@ -12932,7 +12824,7 @@
       </p:sp>
       <p:sp>
         <p:nvSpPr>
-          <p:cNvPr id="391" name="Google Shape;391;p27"/>
+          <p:cNvPr id="390" name="Google Shape;390;p27"/>
           <p:cNvSpPr/>
           <p:nvPr/>
         </p:nvSpPr>
@@ -12995,7 +12887,7 @@
       </p:sp>
       <p:sp>
         <p:nvSpPr>
-          <p:cNvPr id="392" name="Google Shape;392;p27"/>
+          <p:cNvPr id="391" name="Google Shape;391;p27"/>
           <p:cNvSpPr/>
           <p:nvPr/>
         </p:nvSpPr>
@@ -13058,7 +12950,7 @@
       </p:sp>
       <p:sp>
         <p:nvSpPr>
-          <p:cNvPr id="393" name="Google Shape;393;p27"/>
+          <p:cNvPr id="392" name="Google Shape;392;p27"/>
           <p:cNvSpPr/>
           <p:nvPr/>
         </p:nvSpPr>
@@ -13103,7 +12995,7 @@
       </p:sp>
       <p:sp>
         <p:nvSpPr>
-          <p:cNvPr id="394" name="Google Shape;394;p27"/>
+          <p:cNvPr id="393" name="Google Shape;393;p27"/>
           <p:cNvSpPr/>
           <p:nvPr/>
         </p:nvSpPr>
@@ -13146,7 +13038,7 @@
       </p:sp>
       <p:pic>
         <p:nvPicPr>
-          <p:cNvPr descr="/home/claude/metaverse_deck/icons/check_circle_white.png" id="395" name="Google Shape;395;p27"/>
+          <p:cNvPr descr="/home/claude/metaverse_deck/icons/check_circle_white.png" id="394" name="Google Shape;394;p27"/>
           <p:cNvPicPr preferRelativeResize="0"/>
           <p:nvPr/>
         </p:nvPicPr>
@@ -13173,7 +13065,7 @@
       </p:pic>
       <p:sp>
         <p:nvSpPr>
-          <p:cNvPr id="396" name="Google Shape;396;p27"/>
+          <p:cNvPr id="395" name="Google Shape;395;p27"/>
           <p:cNvSpPr/>
           <p:nvPr/>
         </p:nvSpPr>
@@ -13236,7 +13128,7 @@
       </p:sp>
       <p:sp>
         <p:nvSpPr>
-          <p:cNvPr id="397" name="Google Shape;397;p27"/>
+          <p:cNvPr id="396" name="Google Shape;396;p27"/>
           <p:cNvSpPr/>
           <p:nvPr/>
         </p:nvSpPr>
@@ -13299,7 +13191,7 @@
       </p:sp>
       <p:sp>
         <p:nvSpPr>
-          <p:cNvPr id="398" name="Google Shape;398;p27"/>
+          <p:cNvPr id="397" name="Google Shape;397;p27"/>
           <p:cNvSpPr/>
           <p:nvPr/>
         </p:nvSpPr>
@@ -13344,7 +13236,7 @@
       </p:sp>
       <p:sp>
         <p:nvSpPr>
-          <p:cNvPr id="399" name="Google Shape;399;p27"/>
+          <p:cNvPr id="398" name="Google Shape;398;p27"/>
           <p:cNvSpPr/>
           <p:nvPr/>
         </p:nvSpPr>
@@ -13387,7 +13279,7 @@
       </p:sp>
       <p:pic>
         <p:nvPicPr>
-          <p:cNvPr descr="/home/claude/metaverse_deck/icons/check_circle_white.png" id="400" name="Google Shape;400;p27"/>
+          <p:cNvPr descr="/home/claude/metaverse_deck/icons/check_circle_white.png" id="399" name="Google Shape;399;p27"/>
           <p:cNvPicPr preferRelativeResize="0"/>
           <p:nvPr/>
         </p:nvPicPr>
@@ -13414,7 +13306,7 @@
       </p:pic>
       <p:sp>
         <p:nvSpPr>
-          <p:cNvPr id="401" name="Google Shape;401;p27"/>
+          <p:cNvPr id="400" name="Google Shape;400;p27"/>
           <p:cNvSpPr/>
           <p:nvPr/>
         </p:nvSpPr>
@@ -13477,7 +13369,7 @@
       </p:sp>
       <p:sp>
         <p:nvSpPr>
-          <p:cNvPr id="402" name="Google Shape;402;p27"/>
+          <p:cNvPr id="401" name="Google Shape;401;p27"/>
           <p:cNvSpPr/>
           <p:nvPr/>
         </p:nvSpPr>
@@ -13540,7 +13432,7 @@
       </p:sp>
       <p:sp>
         <p:nvSpPr>
-          <p:cNvPr id="403" name="Google Shape;403;p27"/>
+          <p:cNvPr id="402" name="Google Shape;402;p27"/>
           <p:cNvSpPr/>
           <p:nvPr/>
         </p:nvSpPr>
@@ -13585,7 +13477,7 @@
       </p:sp>
       <p:sp>
         <p:nvSpPr>
-          <p:cNvPr id="404" name="Google Shape;404;p27"/>
+          <p:cNvPr id="403" name="Google Shape;403;p27"/>
           <p:cNvSpPr/>
           <p:nvPr/>
         </p:nvSpPr>
@@ -13628,7 +13520,7 @@
       </p:sp>
       <p:pic>
         <p:nvPicPr>
-          <p:cNvPr descr="/home/claude/metaverse_deck/icons/check_circle_white.png" id="405" name="Google Shape;405;p27"/>
+          <p:cNvPr descr="/home/claude/metaverse_deck/icons/check_circle_white.png" id="404" name="Google Shape;404;p27"/>
           <p:cNvPicPr preferRelativeResize="0"/>
           <p:nvPr/>
         </p:nvPicPr>
@@ -13655,7 +13547,7 @@
       </p:pic>
       <p:sp>
         <p:nvSpPr>
-          <p:cNvPr id="406" name="Google Shape;406;p27"/>
+          <p:cNvPr id="405" name="Google Shape;405;p27"/>
           <p:cNvSpPr/>
           <p:nvPr/>
         </p:nvSpPr>
@@ -13718,7 +13610,7 @@
       </p:sp>
       <p:sp>
         <p:nvSpPr>
-          <p:cNvPr id="407" name="Google Shape;407;p27"/>
+          <p:cNvPr id="406" name="Google Shape;406;p27"/>
           <p:cNvSpPr/>
           <p:nvPr/>
         </p:nvSpPr>
@@ -13781,7 +13673,7 @@
       </p:sp>
       <p:sp>
         <p:nvSpPr>
-          <p:cNvPr id="408" name="Google Shape;408;p27"/>
+          <p:cNvPr id="407" name="Google Shape;407;p27"/>
           <p:cNvSpPr/>
           <p:nvPr/>
         </p:nvSpPr>
@@ -13826,7 +13718,7 @@
       </p:sp>
       <p:sp>
         <p:nvSpPr>
-          <p:cNvPr id="409" name="Google Shape;409;p27"/>
+          <p:cNvPr id="408" name="Google Shape;408;p27"/>
           <p:cNvSpPr/>
           <p:nvPr/>
         </p:nvSpPr>
@@ -13869,7 +13761,7 @@
       </p:sp>
       <p:pic>
         <p:nvPicPr>
-          <p:cNvPr descr="/home/claude/metaverse_deck/icons/check_circle_white.png" id="410" name="Google Shape;410;p27"/>
+          <p:cNvPr descr="/home/claude/metaverse_deck/icons/check_circle_white.png" id="409" name="Google Shape;409;p27"/>
           <p:cNvPicPr preferRelativeResize="0"/>
           <p:nvPr/>
         </p:nvPicPr>
@@ -13896,7 +13788,7 @@
       </p:pic>
       <p:sp>
         <p:nvSpPr>
-          <p:cNvPr id="411" name="Google Shape;411;p27"/>
+          <p:cNvPr id="410" name="Google Shape;410;p27"/>
           <p:cNvSpPr/>
           <p:nvPr/>
         </p:nvSpPr>
@@ -13959,7 +13851,7 @@
       </p:sp>
       <p:sp>
         <p:nvSpPr>
-          <p:cNvPr id="412" name="Google Shape;412;p27"/>
+          <p:cNvPr id="411" name="Google Shape;411;p27"/>
           <p:cNvSpPr/>
           <p:nvPr/>
         </p:nvSpPr>
@@ -14022,7 +13914,7 @@
       </p:sp>
       <p:sp>
         <p:nvSpPr>
-          <p:cNvPr id="413" name="Google Shape;413;p27"/>
+          <p:cNvPr id="412" name="Google Shape;412;p27"/>
           <p:cNvSpPr/>
           <p:nvPr/>
         </p:nvSpPr>
@@ -14067,7 +13959,7 @@
       </p:sp>
       <p:sp>
         <p:nvSpPr>
-          <p:cNvPr id="414" name="Google Shape;414;p27"/>
+          <p:cNvPr id="413" name="Google Shape;413;p27"/>
           <p:cNvSpPr/>
           <p:nvPr/>
         </p:nvSpPr>
@@ -14110,7 +14002,7 @@
       </p:sp>
       <p:pic>
         <p:nvPicPr>
-          <p:cNvPr descr="/home/claude/metaverse_deck/icons/check_circle_white.png" id="415" name="Google Shape;415;p27"/>
+          <p:cNvPr descr="/home/claude/metaverse_deck/icons/check_circle_white.png" id="414" name="Google Shape;414;p27"/>
           <p:cNvPicPr preferRelativeResize="0"/>
           <p:nvPr/>
         </p:nvPicPr>
@@ -14137,7 +14029,7 @@
       </p:pic>
       <p:sp>
         <p:nvSpPr>
-          <p:cNvPr id="416" name="Google Shape;416;p27"/>
+          <p:cNvPr id="415" name="Google Shape;415;p27"/>
           <p:cNvSpPr/>
           <p:nvPr/>
         </p:nvSpPr>
@@ -14200,7 +14092,7 @@
       </p:sp>
       <p:sp>
         <p:nvSpPr>
-          <p:cNvPr id="417" name="Google Shape;417;p27"/>
+          <p:cNvPr id="416" name="Google Shape;416;p27"/>
           <p:cNvSpPr/>
           <p:nvPr/>
         </p:nvSpPr>
@@ -14263,7 +14155,7 @@
       </p:sp>
       <p:sp>
         <p:nvSpPr>
-          <p:cNvPr id="418" name="Google Shape;418;p27"/>
+          <p:cNvPr id="417" name="Google Shape;417;p27"/>
           <p:cNvSpPr/>
           <p:nvPr/>
         </p:nvSpPr>
@@ -14326,7 +14218,7 @@
       </p:sp>
       <p:sp>
         <p:nvSpPr>
-          <p:cNvPr id="419" name="Google Shape;419;p27"/>
+          <p:cNvPr id="418" name="Google Shape;418;p27"/>
           <p:cNvSpPr/>
           <p:nvPr/>
         </p:nvSpPr>
@@ -14400,7 +14292,7 @@
   <p:cSld>
     <p:spTree>
       <p:nvGrpSpPr>
-        <p:cNvPr id="74" name="Shape 74"/>
+        <p:cNvPr id="72" name="Shape 72"/>
         <p:cNvGrpSpPr/>
         <p:nvPr/>
       </p:nvGrpSpPr>
@@ -14414,7 +14306,7 @@
       </p:grpSpPr>
       <p:sp>
         <p:nvSpPr>
-          <p:cNvPr id="75" name="Google Shape;75;p16"/>
+          <p:cNvPr id="73" name="Google Shape;73;p16"/>
           <p:cNvSpPr/>
           <p:nvPr/>
         </p:nvSpPr>
@@ -14457,7 +14349,7 @@
       </p:sp>
       <p:sp>
         <p:nvSpPr>
-          <p:cNvPr id="76" name="Google Shape;76;p16"/>
+          <p:cNvPr id="74" name="Google Shape;74;p16"/>
           <p:cNvSpPr/>
           <p:nvPr/>
         </p:nvSpPr>
@@ -14502,7 +14394,7 @@
       </p:sp>
       <p:sp>
         <p:nvSpPr>
-          <p:cNvPr id="77" name="Google Shape;77;p16"/>
+          <p:cNvPr id="75" name="Google Shape;75;p16"/>
           <p:cNvSpPr/>
           <p:nvPr/>
         </p:nvSpPr>
@@ -14565,7 +14457,7 @@
       </p:sp>
       <p:sp>
         <p:nvSpPr>
-          <p:cNvPr id="78" name="Google Shape;78;p16"/>
+          <p:cNvPr id="76" name="Google Shape;76;p16"/>
           <p:cNvSpPr/>
           <p:nvPr/>
         </p:nvSpPr>
@@ -14628,7 +14520,7 @@
       </p:sp>
       <p:cxnSp>
         <p:nvCxnSpPr>
-          <p:cNvPr id="79" name="Google Shape;79;p16"/>
+          <p:cNvPr id="77" name="Google Shape;77;p16"/>
           <p:cNvCxnSpPr/>
           <p:nvPr/>
         </p:nvCxnSpPr>
@@ -14654,7 +14546,7 @@
       </p:cxnSp>
       <p:sp>
         <p:nvSpPr>
-          <p:cNvPr id="80" name="Google Shape;80;p16"/>
+          <p:cNvPr id="78" name="Google Shape;78;p16"/>
           <p:cNvSpPr/>
           <p:nvPr/>
         </p:nvSpPr>
@@ -14697,7 +14589,7 @@
       </p:sp>
       <p:pic>
         <p:nvPicPr>
-          <p:cNvPr descr="/home/claude/metaverse_deck/icons/book_white.png" id="81" name="Google Shape;81;p16"/>
+          <p:cNvPr descr="/home/claude/metaverse_deck/icons/book_white.png" id="79" name="Google Shape;79;p16"/>
           <p:cNvPicPr preferRelativeResize="0"/>
           <p:nvPr/>
         </p:nvPicPr>
@@ -14724,7 +14616,7 @@
       </p:pic>
       <p:sp>
         <p:nvSpPr>
-          <p:cNvPr id="82" name="Google Shape;82;p16"/>
+          <p:cNvPr id="80" name="Google Shape;80;p16"/>
           <p:cNvSpPr/>
           <p:nvPr/>
         </p:nvSpPr>
@@ -14769,7 +14661,7 @@
       </p:sp>
       <p:sp>
         <p:nvSpPr>
-          <p:cNvPr id="83" name="Google Shape;83;p16"/>
+          <p:cNvPr id="81" name="Google Shape;81;p16"/>
           <p:cNvSpPr/>
           <p:nvPr/>
         </p:nvSpPr>
@@ -14832,7 +14724,7 @@
       </p:sp>
       <p:sp>
         <p:nvSpPr>
-          <p:cNvPr id="84" name="Google Shape;84;p16"/>
+          <p:cNvPr id="82" name="Google Shape;82;p16"/>
           <p:cNvSpPr/>
           <p:nvPr/>
         </p:nvSpPr>
@@ -14895,7 +14787,7 @@
       </p:sp>
       <p:sp>
         <p:nvSpPr>
-          <p:cNvPr id="85" name="Google Shape;85;p16"/>
+          <p:cNvPr id="83" name="Google Shape;83;p16"/>
           <p:cNvSpPr/>
           <p:nvPr/>
         </p:nvSpPr>
@@ -15041,7 +14933,7 @@
       </p:sp>
       <p:sp>
         <p:nvSpPr>
-          <p:cNvPr id="86" name="Google Shape;86;p16"/>
+          <p:cNvPr id="84" name="Google Shape;84;p16"/>
           <p:cNvSpPr/>
           <p:nvPr/>
         </p:nvSpPr>
@@ -15084,7 +14976,7 @@
       </p:sp>
       <p:pic>
         <p:nvPicPr>
-          <p:cNvPr descr="/home/claude/metaverse_deck/icons/history_white.png" id="87" name="Google Shape;87;p16"/>
+          <p:cNvPr descr="/home/claude/metaverse_deck/icons/history_white.png" id="85" name="Google Shape;85;p16"/>
           <p:cNvPicPr preferRelativeResize="0"/>
           <p:nvPr/>
         </p:nvPicPr>
@@ -15111,7 +15003,7 @@
       </p:pic>
       <p:sp>
         <p:nvSpPr>
-          <p:cNvPr id="88" name="Google Shape;88;p16"/>
+          <p:cNvPr id="86" name="Google Shape;86;p16"/>
           <p:cNvSpPr/>
           <p:nvPr/>
         </p:nvSpPr>
@@ -15156,7 +15048,7 @@
       </p:sp>
       <p:sp>
         <p:nvSpPr>
-          <p:cNvPr id="89" name="Google Shape;89;p16"/>
+          <p:cNvPr id="87" name="Google Shape;87;p16"/>
           <p:cNvSpPr/>
           <p:nvPr/>
         </p:nvSpPr>
@@ -15219,7 +15111,7 @@
       </p:sp>
       <p:sp>
         <p:nvSpPr>
-          <p:cNvPr id="90" name="Google Shape;90;p16"/>
+          <p:cNvPr id="88" name="Google Shape;88;p16"/>
           <p:cNvSpPr/>
           <p:nvPr/>
         </p:nvSpPr>
@@ -15282,7 +15174,7 @@
       </p:sp>
       <p:sp>
         <p:nvSpPr>
-          <p:cNvPr id="91" name="Google Shape;91;p16"/>
+          <p:cNvPr id="89" name="Google Shape;89;p16"/>
           <p:cNvSpPr/>
           <p:nvPr/>
         </p:nvSpPr>
@@ -15428,7 +15320,7 @@
       </p:sp>
       <p:sp>
         <p:nvSpPr>
-          <p:cNvPr id="92" name="Google Shape;92;p16"/>
+          <p:cNvPr id="90" name="Google Shape;90;p16"/>
           <p:cNvSpPr/>
           <p:nvPr/>
         </p:nvSpPr>
@@ -15471,7 +15363,7 @@
       </p:sp>
       <p:pic>
         <p:nvPicPr>
-          <p:cNvPr descr="/home/claude/metaverse_deck/icons/rocket_white.png" id="93" name="Google Shape;93;p16"/>
+          <p:cNvPr descr="/home/claude/metaverse_deck/icons/rocket_white.png" id="91" name="Google Shape;91;p16"/>
           <p:cNvPicPr preferRelativeResize="0"/>
           <p:nvPr/>
         </p:nvPicPr>
@@ -15498,7 +15390,7 @@
       </p:pic>
       <p:sp>
         <p:nvSpPr>
-          <p:cNvPr id="94" name="Google Shape;94;p16"/>
+          <p:cNvPr id="92" name="Google Shape;92;p16"/>
           <p:cNvSpPr/>
           <p:nvPr/>
         </p:nvSpPr>
@@ -15543,7 +15435,7 @@
       </p:sp>
       <p:sp>
         <p:nvSpPr>
-          <p:cNvPr id="95" name="Google Shape;95;p16"/>
+          <p:cNvPr id="93" name="Google Shape;93;p16"/>
           <p:cNvSpPr/>
           <p:nvPr/>
         </p:nvSpPr>
@@ -15606,7 +15498,7 @@
       </p:sp>
       <p:sp>
         <p:nvSpPr>
-          <p:cNvPr id="96" name="Google Shape;96;p16"/>
+          <p:cNvPr id="94" name="Google Shape;94;p16"/>
           <p:cNvSpPr/>
           <p:nvPr/>
         </p:nvSpPr>
@@ -15669,7 +15561,7 @@
       </p:sp>
       <p:sp>
         <p:nvSpPr>
-          <p:cNvPr id="97" name="Google Shape;97;p16"/>
+          <p:cNvPr id="95" name="Google Shape;95;p16"/>
           <p:cNvSpPr/>
           <p:nvPr/>
         </p:nvSpPr>
@@ -15815,7 +15707,7 @@
       </p:sp>
       <p:sp>
         <p:nvSpPr>
-          <p:cNvPr id="98" name="Google Shape;98;p16"/>
+          <p:cNvPr id="96" name="Google Shape;96;p16"/>
           <p:cNvSpPr/>
           <p:nvPr/>
         </p:nvSpPr>
@@ -15858,7 +15750,7 @@
       </p:sp>
       <p:pic>
         <p:nvPicPr>
-          <p:cNvPr descr="/home/claude/metaverse_deck/icons/chart_line_white.png" id="99" name="Google Shape;99;p16"/>
+          <p:cNvPr descr="/home/claude/metaverse_deck/icons/chart_line_white.png" id="97" name="Google Shape;97;p16"/>
           <p:cNvPicPr preferRelativeResize="0"/>
           <p:nvPr/>
         </p:nvPicPr>
@@ -15885,7 +15777,7 @@
       </p:pic>
       <p:sp>
         <p:nvSpPr>
-          <p:cNvPr id="100" name="Google Shape;100;p16"/>
+          <p:cNvPr id="98" name="Google Shape;98;p16"/>
           <p:cNvSpPr/>
           <p:nvPr/>
         </p:nvSpPr>
@@ -15930,7 +15822,7 @@
       </p:sp>
       <p:sp>
         <p:nvSpPr>
-          <p:cNvPr id="101" name="Google Shape;101;p16"/>
+          <p:cNvPr id="99" name="Google Shape;99;p16"/>
           <p:cNvSpPr/>
           <p:nvPr/>
         </p:nvSpPr>
@@ -15993,7 +15885,7 @@
       </p:sp>
       <p:sp>
         <p:nvSpPr>
-          <p:cNvPr id="102" name="Google Shape;102;p16"/>
+          <p:cNvPr id="100" name="Google Shape;100;p16"/>
           <p:cNvSpPr/>
           <p:nvPr/>
         </p:nvSpPr>
@@ -16056,7 +15948,7 @@
       </p:sp>
       <p:sp>
         <p:nvSpPr>
-          <p:cNvPr id="103" name="Google Shape;103;p16"/>
+          <p:cNvPr id="101" name="Google Shape;101;p16"/>
           <p:cNvSpPr/>
           <p:nvPr/>
         </p:nvSpPr>
@@ -16202,7 +16094,7 @@
       </p:sp>
       <p:sp>
         <p:nvSpPr>
-          <p:cNvPr id="104" name="Google Shape;104;p16"/>
+          <p:cNvPr id="102" name="Google Shape;102;p16"/>
           <p:cNvSpPr/>
           <p:nvPr/>
         </p:nvSpPr>
@@ -16265,7 +16157,7 @@
       </p:sp>
       <p:sp>
         <p:nvSpPr>
-          <p:cNvPr id="105" name="Google Shape;105;p16"/>
+          <p:cNvPr id="103" name="Google Shape;103;p16"/>
           <p:cNvSpPr/>
           <p:nvPr/>
         </p:nvSpPr>
@@ -16339,7 +16231,7 @@
   <p:cSld>
     <p:spTree>
       <p:nvGrpSpPr>
-        <p:cNvPr id="110" name="Shape 110"/>
+        <p:cNvPr id="108" name="Shape 108"/>
         <p:cNvGrpSpPr/>
         <p:nvPr/>
       </p:nvGrpSpPr>
@@ -16353,7 +16245,7 @@
       </p:grpSpPr>
       <p:sp>
         <p:nvSpPr>
-          <p:cNvPr id="111" name="Google Shape;111;p17"/>
+          <p:cNvPr id="109" name="Google Shape;109;p17"/>
           <p:cNvSpPr/>
           <p:nvPr/>
         </p:nvSpPr>
@@ -16396,7 +16288,7 @@
       </p:sp>
       <p:sp>
         <p:nvSpPr>
-          <p:cNvPr id="112" name="Google Shape;112;p17"/>
+          <p:cNvPr id="110" name="Google Shape;110;p17"/>
           <p:cNvSpPr/>
           <p:nvPr/>
         </p:nvSpPr>
@@ -16441,7 +16333,7 @@
       </p:sp>
       <p:sp>
         <p:nvSpPr>
-          <p:cNvPr id="113" name="Google Shape;113;p17"/>
+          <p:cNvPr id="111" name="Google Shape;111;p17"/>
           <p:cNvSpPr/>
           <p:nvPr/>
         </p:nvSpPr>
@@ -16504,7 +16396,7 @@
       </p:sp>
       <p:sp>
         <p:nvSpPr>
-          <p:cNvPr id="114" name="Google Shape;114;p17"/>
+          <p:cNvPr id="112" name="Google Shape;112;p17"/>
           <p:cNvSpPr/>
           <p:nvPr/>
         </p:nvSpPr>
@@ -16567,7 +16459,7 @@
       </p:sp>
       <p:sp>
         <p:nvSpPr>
-          <p:cNvPr id="115" name="Google Shape;115;p17"/>
+          <p:cNvPr id="113" name="Google Shape;113;p17"/>
           <p:cNvSpPr/>
           <p:nvPr/>
         </p:nvSpPr>
@@ -16630,7 +16522,7 @@
       </p:sp>
       <p:sp>
         <p:nvSpPr>
-          <p:cNvPr id="116" name="Google Shape;116;p17"/>
+          <p:cNvPr id="114" name="Google Shape;114;p17"/>
           <p:cNvSpPr/>
           <p:nvPr/>
         </p:nvSpPr>
@@ -16675,7 +16567,7 @@
       </p:sp>
       <p:sp>
         <p:nvSpPr>
-          <p:cNvPr id="117" name="Google Shape;117;p17"/>
+          <p:cNvPr id="115" name="Google Shape;115;p17"/>
           <p:cNvSpPr/>
           <p:nvPr/>
         </p:nvSpPr>
@@ -16718,7 +16610,7 @@
       </p:sp>
       <p:pic>
         <p:nvPicPr>
-          <p:cNvPr descr="/home/claude/metaverse_deck/icons/cube_3d_white.png" id="118" name="Google Shape;118;p17"/>
+          <p:cNvPr descr="/home/claude/metaverse_deck/icons/cube_3d_white.png" id="116" name="Google Shape;116;p17"/>
           <p:cNvPicPr preferRelativeResize="0"/>
           <p:nvPr/>
         </p:nvPicPr>
@@ -16745,7 +16637,7 @@
       </p:pic>
       <p:sp>
         <p:nvSpPr>
-          <p:cNvPr id="119" name="Google Shape;119;p17"/>
+          <p:cNvPr id="117" name="Google Shape;117;p17"/>
           <p:cNvSpPr/>
           <p:nvPr/>
         </p:nvSpPr>
@@ -16808,7 +16700,7 @@
       </p:sp>
       <p:sp>
         <p:nvSpPr>
-          <p:cNvPr id="120" name="Google Shape;120;p17"/>
+          <p:cNvPr id="118" name="Google Shape;118;p17"/>
           <p:cNvSpPr/>
           <p:nvPr/>
         </p:nvSpPr>
@@ -16874,7 +16766,7 @@
       </p:sp>
       <p:sp>
         <p:nvSpPr>
-          <p:cNvPr id="121" name="Google Shape;121;p17"/>
+          <p:cNvPr id="119" name="Google Shape;119;p17"/>
           <p:cNvSpPr/>
           <p:nvPr/>
         </p:nvSpPr>
@@ -16919,7 +16811,7 @@
       </p:sp>
       <p:sp>
         <p:nvSpPr>
-          <p:cNvPr id="122" name="Google Shape;122;p17"/>
+          <p:cNvPr id="120" name="Google Shape;120;p17"/>
           <p:cNvSpPr/>
           <p:nvPr/>
         </p:nvSpPr>
@@ -16962,7 +16854,7 @@
       </p:sp>
       <p:pic>
         <p:nvPicPr>
-          <p:cNvPr descr="/home/claude/metaverse_deck/icons/avatar_white.png" id="123" name="Google Shape;123;p17"/>
+          <p:cNvPr descr="/home/claude/metaverse_deck/icons/avatar_white.png" id="121" name="Google Shape;121;p17"/>
           <p:cNvPicPr preferRelativeResize="0"/>
           <p:nvPr/>
         </p:nvPicPr>
@@ -16989,7 +16881,7 @@
       </p:pic>
       <p:sp>
         <p:nvSpPr>
-          <p:cNvPr id="124" name="Google Shape;124;p17"/>
+          <p:cNvPr id="122" name="Google Shape;122;p17"/>
           <p:cNvSpPr/>
           <p:nvPr/>
         </p:nvSpPr>
@@ -17052,7 +16944,7 @@
       </p:sp>
       <p:sp>
         <p:nvSpPr>
-          <p:cNvPr id="125" name="Google Shape;125;p17"/>
+          <p:cNvPr id="123" name="Google Shape;123;p17"/>
           <p:cNvSpPr/>
           <p:nvPr/>
         </p:nvSpPr>
@@ -17118,7 +17010,7 @@
       </p:sp>
       <p:sp>
         <p:nvSpPr>
-          <p:cNvPr id="126" name="Google Shape;126;p17"/>
+          <p:cNvPr id="124" name="Google Shape;124;p17"/>
           <p:cNvSpPr/>
           <p:nvPr/>
         </p:nvSpPr>
@@ -17163,7 +17055,7 @@
       </p:sp>
       <p:sp>
         <p:nvSpPr>
-          <p:cNvPr id="127" name="Google Shape;127;p17"/>
+          <p:cNvPr id="125" name="Google Shape;125;p17"/>
           <p:cNvSpPr/>
           <p:nvPr/>
         </p:nvSpPr>
@@ -17206,7 +17098,7 @@
       </p:sp>
       <p:pic>
         <p:nvPicPr>
-          <p:cNvPr descr="/home/claude/metaverse_deck/icons/users_group_white.png" id="128" name="Google Shape;128;p17"/>
+          <p:cNvPr descr="/home/claude/metaverse_deck/icons/users_group_white.png" id="126" name="Google Shape;126;p17"/>
           <p:cNvPicPr preferRelativeResize="0"/>
           <p:nvPr/>
         </p:nvPicPr>
@@ -17233,7 +17125,7 @@
       </p:pic>
       <p:sp>
         <p:nvSpPr>
-          <p:cNvPr id="129" name="Google Shape;129;p17"/>
+          <p:cNvPr id="127" name="Google Shape;127;p17"/>
           <p:cNvSpPr/>
           <p:nvPr/>
         </p:nvSpPr>
@@ -17296,7 +17188,7 @@
       </p:sp>
       <p:sp>
         <p:nvSpPr>
-          <p:cNvPr id="130" name="Google Shape;130;p17"/>
+          <p:cNvPr id="128" name="Google Shape;128;p17"/>
           <p:cNvSpPr/>
           <p:nvPr/>
         </p:nvSpPr>
@@ -17362,7 +17254,7 @@
       </p:sp>
       <p:sp>
         <p:nvSpPr>
-          <p:cNvPr id="131" name="Google Shape;131;p17"/>
+          <p:cNvPr id="129" name="Google Shape;129;p17"/>
           <p:cNvSpPr/>
           <p:nvPr/>
         </p:nvSpPr>
@@ -17407,7 +17299,7 @@
       </p:sp>
       <p:sp>
         <p:nvSpPr>
-          <p:cNvPr id="132" name="Google Shape;132;p17"/>
+          <p:cNvPr id="130" name="Google Shape;130;p17"/>
           <p:cNvSpPr/>
           <p:nvPr/>
         </p:nvSpPr>
@@ -17450,7 +17342,7 @@
       </p:sp>
       <p:pic>
         <p:nvPicPr>
-          <p:cNvPr descr="/home/claude/metaverse_deck/icons/coins_white.png" id="133" name="Google Shape;133;p17"/>
+          <p:cNvPr descr="/home/claude/metaverse_deck/icons/coins_white.png" id="131" name="Google Shape;131;p17"/>
           <p:cNvPicPr preferRelativeResize="0"/>
           <p:nvPr/>
         </p:nvPicPr>
@@ -17477,7 +17369,7 @@
       </p:pic>
       <p:sp>
         <p:nvSpPr>
-          <p:cNvPr id="134" name="Google Shape;134;p17"/>
+          <p:cNvPr id="132" name="Google Shape;132;p17"/>
           <p:cNvSpPr/>
           <p:nvPr/>
         </p:nvSpPr>
@@ -17540,7 +17432,7 @@
       </p:sp>
       <p:sp>
         <p:nvSpPr>
-          <p:cNvPr id="135" name="Google Shape;135;p17"/>
+          <p:cNvPr id="133" name="Google Shape;133;p17"/>
           <p:cNvSpPr/>
           <p:nvPr/>
         </p:nvSpPr>
@@ -17606,7 +17498,7 @@
       </p:sp>
       <p:sp>
         <p:nvSpPr>
-          <p:cNvPr id="136" name="Google Shape;136;p17"/>
+          <p:cNvPr id="134" name="Google Shape;134;p17"/>
           <p:cNvSpPr/>
           <p:nvPr/>
         </p:nvSpPr>
@@ -17651,7 +17543,7 @@
       </p:sp>
       <p:sp>
         <p:nvSpPr>
-          <p:cNvPr id="137" name="Google Shape;137;p17"/>
+          <p:cNvPr id="135" name="Google Shape;135;p17"/>
           <p:cNvSpPr/>
           <p:nvPr/>
         </p:nvSpPr>
@@ -17726,7 +17618,7 @@
       </p:sp>
       <p:sp>
         <p:nvSpPr>
-          <p:cNvPr id="138" name="Google Shape;138;p17"/>
+          <p:cNvPr id="136" name="Google Shape;136;p17"/>
           <p:cNvSpPr/>
           <p:nvPr/>
         </p:nvSpPr>
@@ -17789,7 +17681,7 @@
       </p:sp>
       <p:sp>
         <p:nvSpPr>
-          <p:cNvPr id="139" name="Google Shape;139;p17"/>
+          <p:cNvPr id="137" name="Google Shape;137;p17"/>
           <p:cNvSpPr/>
           <p:nvPr/>
         </p:nvSpPr>
@@ -17863,7 +17755,7 @@
   <p:cSld>
     <p:spTree>
       <p:nvGrpSpPr>
-        <p:cNvPr id="144" name="Shape 144"/>
+        <p:cNvPr id="142" name="Shape 142"/>
         <p:cNvGrpSpPr/>
         <p:nvPr/>
       </p:nvGrpSpPr>
@@ -17877,7 +17769,7 @@
       </p:grpSpPr>
       <p:sp>
         <p:nvSpPr>
-          <p:cNvPr id="145" name="Google Shape;145;p18"/>
+          <p:cNvPr id="143" name="Google Shape;143;p18"/>
           <p:cNvSpPr/>
           <p:nvPr/>
         </p:nvSpPr>
@@ -17920,7 +17812,7 @@
       </p:sp>
       <p:sp>
         <p:nvSpPr>
-          <p:cNvPr id="146" name="Google Shape;146;p18"/>
+          <p:cNvPr id="144" name="Google Shape;144;p18"/>
           <p:cNvSpPr/>
           <p:nvPr/>
         </p:nvSpPr>
@@ -17965,7 +17857,7 @@
       </p:sp>
       <p:sp>
         <p:nvSpPr>
-          <p:cNvPr id="147" name="Google Shape;147;p18"/>
+          <p:cNvPr id="145" name="Google Shape;145;p18"/>
           <p:cNvSpPr/>
           <p:nvPr/>
         </p:nvSpPr>
@@ -18028,7 +17920,7 @@
       </p:sp>
       <p:sp>
         <p:nvSpPr>
-          <p:cNvPr id="148" name="Google Shape;148;p18"/>
+          <p:cNvPr id="146" name="Google Shape;146;p18"/>
           <p:cNvSpPr/>
           <p:nvPr/>
         </p:nvSpPr>
@@ -18091,7 +17983,7 @@
       </p:sp>
       <p:sp>
         <p:nvSpPr>
-          <p:cNvPr id="149" name="Google Shape;149;p18"/>
+          <p:cNvPr id="147" name="Google Shape;147;p18"/>
           <p:cNvSpPr/>
           <p:nvPr/>
         </p:nvSpPr>
@@ -18154,7 +18046,7 @@
       </p:sp>
       <p:cxnSp>
         <p:nvCxnSpPr>
-          <p:cNvPr id="150" name="Google Shape;150;p18"/>
+          <p:cNvPr id="148" name="Google Shape;148;p18"/>
           <p:cNvCxnSpPr/>
           <p:nvPr/>
         </p:nvCxnSpPr>
@@ -18180,7 +18072,7 @@
       </p:cxnSp>
       <p:sp>
         <p:nvSpPr>
-          <p:cNvPr id="151" name="Google Shape;151;p18"/>
+          <p:cNvPr id="149" name="Google Shape;149;p18"/>
           <p:cNvSpPr/>
           <p:nvPr/>
         </p:nvSpPr>
@@ -18225,7 +18117,7 @@
       </p:sp>
       <p:sp>
         <p:nvSpPr>
-          <p:cNvPr id="152" name="Google Shape;152;p18"/>
+          <p:cNvPr id="150" name="Google Shape;150;p18"/>
           <p:cNvSpPr/>
           <p:nvPr/>
         </p:nvSpPr>
@@ -18268,7 +18160,7 @@
       </p:sp>
       <p:pic>
         <p:nvPicPr>
-          <p:cNvPr descr="/home/claude/metaverse_deck/icons/desktop_white.png" id="153" name="Google Shape;153;p18"/>
+          <p:cNvPr descr="/home/claude/metaverse_deck/icons/desktop_white.png" id="151" name="Google Shape;151;p18"/>
           <p:cNvPicPr preferRelativeResize="0"/>
           <p:nvPr/>
         </p:nvPicPr>
@@ -18295,7 +18187,7 @@
       </p:pic>
       <p:sp>
         <p:nvSpPr>
-          <p:cNvPr id="154" name="Google Shape;154;p18"/>
+          <p:cNvPr id="152" name="Google Shape;152;p18"/>
           <p:cNvSpPr/>
           <p:nvPr/>
         </p:nvSpPr>
@@ -18358,7 +18250,7 @@
       </p:sp>
       <p:cxnSp>
         <p:nvCxnSpPr>
-          <p:cNvPr id="155" name="Google Shape;155;p18"/>
+          <p:cNvPr id="153" name="Google Shape;153;p18"/>
           <p:cNvCxnSpPr/>
           <p:nvPr/>
         </p:nvCxnSpPr>
@@ -18384,7 +18276,7 @@
       </p:cxnSp>
       <p:sp>
         <p:nvSpPr>
-          <p:cNvPr id="156" name="Google Shape;156;p18"/>
+          <p:cNvPr id="154" name="Google Shape;154;p18"/>
           <p:cNvSpPr/>
           <p:nvPr/>
         </p:nvSpPr>
@@ -18429,7 +18321,7 @@
       </p:sp>
       <p:sp>
         <p:nvSpPr>
-          <p:cNvPr id="157" name="Google Shape;157;p18"/>
+          <p:cNvPr id="155" name="Google Shape;155;p18"/>
           <p:cNvSpPr/>
           <p:nvPr/>
         </p:nvSpPr>
@@ -18472,7 +18364,7 @@
       </p:sp>
       <p:pic>
         <p:nvPicPr>
-          <p:cNvPr descr="/home/claude/metaverse_deck/icons/mobile_white.png" id="158" name="Google Shape;158;p18"/>
+          <p:cNvPr descr="/home/claude/metaverse_deck/icons/mobile_white.png" id="156" name="Google Shape;156;p18"/>
           <p:cNvPicPr preferRelativeResize="0"/>
           <p:nvPr/>
         </p:nvPicPr>
@@ -18499,7 +18391,7 @@
       </p:pic>
       <p:sp>
         <p:nvSpPr>
-          <p:cNvPr id="159" name="Google Shape;159;p18"/>
+          <p:cNvPr id="157" name="Google Shape;157;p18"/>
           <p:cNvSpPr/>
           <p:nvPr/>
         </p:nvSpPr>
@@ -18562,7 +18454,7 @@
       </p:sp>
       <p:cxnSp>
         <p:nvCxnSpPr>
-          <p:cNvPr id="160" name="Google Shape;160;p18"/>
+          <p:cNvPr id="158" name="Google Shape;158;p18"/>
           <p:cNvCxnSpPr/>
           <p:nvPr/>
         </p:nvCxnSpPr>
@@ -18588,7 +18480,7 @@
       </p:cxnSp>
       <p:sp>
         <p:nvSpPr>
-          <p:cNvPr id="161" name="Google Shape;161;p18"/>
+          <p:cNvPr id="159" name="Google Shape;159;p18"/>
           <p:cNvSpPr/>
           <p:nvPr/>
         </p:nvSpPr>
@@ -18633,7 +18525,7 @@
       </p:sp>
       <p:sp>
         <p:nvSpPr>
-          <p:cNvPr id="162" name="Google Shape;162;p18"/>
+          <p:cNvPr id="160" name="Google Shape;160;p18"/>
           <p:cNvSpPr/>
           <p:nvPr/>
         </p:nvSpPr>
@@ -18676,7 +18568,7 @@
       </p:sp>
       <p:pic>
         <p:nvPicPr>
-          <p:cNvPr descr="/home/claude/metaverse_deck/icons/tablet_white.png" id="163" name="Google Shape;163;p18"/>
+          <p:cNvPr descr="/home/claude/metaverse_deck/icons/tablet_white.png" id="161" name="Google Shape;161;p18"/>
           <p:cNvPicPr preferRelativeResize="0"/>
           <p:nvPr/>
         </p:nvPicPr>
@@ -18703,7 +18595,7 @@
       </p:pic>
       <p:sp>
         <p:nvSpPr>
-          <p:cNvPr id="164" name="Google Shape;164;p18"/>
+          <p:cNvPr id="162" name="Google Shape;162;p18"/>
           <p:cNvSpPr/>
           <p:nvPr/>
         </p:nvSpPr>
@@ -18766,7 +18658,7 @@
       </p:sp>
       <p:cxnSp>
         <p:nvCxnSpPr>
-          <p:cNvPr id="165" name="Google Shape;165;p18"/>
+          <p:cNvPr id="163" name="Google Shape;163;p18"/>
           <p:cNvCxnSpPr/>
           <p:nvPr/>
         </p:nvCxnSpPr>
@@ -18792,14 +18684,14 @@
       </p:cxnSp>
       <p:sp>
         <p:nvSpPr>
-          <p:cNvPr id="166" name="Google Shape;166;p18"/>
+          <p:cNvPr id="164" name="Google Shape;164;p18"/>
           <p:cNvSpPr/>
           <p:nvPr/>
         </p:nvSpPr>
         <p:spPr>
           <a:xfrm>
             <a:off x="411480" y="3936492"/>
-            <a:ext cx="2400300" cy="582930"/>
+            <a:ext cx="2400300" cy="582900"/>
           </a:xfrm>
           <a:prstGeom prst="roundRect">
             <a:avLst>
@@ -18837,7 +18729,7 @@
       </p:sp>
       <p:sp>
         <p:nvSpPr>
-          <p:cNvPr id="167" name="Google Shape;167;p18"/>
+          <p:cNvPr id="165" name="Google Shape;165;p18"/>
           <p:cNvSpPr/>
           <p:nvPr/>
         </p:nvSpPr>
@@ -18880,7 +18772,7 @@
       </p:sp>
       <p:pic>
         <p:nvPicPr>
-          <p:cNvPr descr="/home/claude/metaverse_deck/icons/vr_headset_white.png" id="168" name="Google Shape;168;p18"/>
+          <p:cNvPr descr="/home/claude/metaverse_deck/icons/vr_headset_white.png" id="166" name="Google Shape;166;p18"/>
           <p:cNvPicPr preferRelativeResize="0"/>
           <p:nvPr/>
         </p:nvPicPr>
@@ -18907,14 +18799,14 @@
       </p:pic>
       <p:sp>
         <p:nvSpPr>
-          <p:cNvPr id="169" name="Google Shape;169;p18"/>
+          <p:cNvPr id="167" name="Google Shape;167;p18"/>
           <p:cNvSpPr/>
           <p:nvPr/>
         </p:nvSpPr>
         <p:spPr>
           <a:xfrm>
             <a:off x="1028700" y="3936492"/>
-            <a:ext cx="1680210" cy="582930"/>
+            <a:ext cx="1680300" cy="582900"/>
           </a:xfrm>
           <a:prstGeom prst="rect">
             <a:avLst/>
@@ -18970,7 +18862,7 @@
       </p:sp>
       <p:sp>
         <p:nvSpPr>
-          <p:cNvPr id="170" name="Google Shape;170;p18"/>
+          <p:cNvPr id="168" name="Google Shape;168;p18"/>
           <p:cNvSpPr/>
           <p:nvPr/>
         </p:nvSpPr>
@@ -19013,7 +18905,7 @@
       </p:sp>
       <p:sp>
         <p:nvSpPr>
-          <p:cNvPr id="171" name="Google Shape;171;p18"/>
+          <p:cNvPr id="169" name="Google Shape;169;p18"/>
           <p:cNvSpPr/>
           <p:nvPr/>
         </p:nvSpPr>
@@ -19113,14 +19005,14 @@
       </p:sp>
       <p:sp>
         <p:nvSpPr>
-          <p:cNvPr id="172" name="Google Shape;172;p18"/>
+          <p:cNvPr id="170" name="Google Shape;170;p18"/>
           <p:cNvSpPr/>
           <p:nvPr/>
         </p:nvSpPr>
         <p:spPr>
           <a:xfrm>
             <a:off x="377190" y="4423410"/>
-            <a:ext cx="8401050" cy="445770"/>
+            <a:ext cx="8401200" cy="445800"/>
           </a:xfrm>
           <a:prstGeom prst="roundRect">
             <a:avLst>
@@ -19158,14 +19050,14 @@
       </p:sp>
       <p:sp>
         <p:nvSpPr>
-          <p:cNvPr id="173" name="Google Shape;173;p18"/>
+          <p:cNvPr id="171" name="Google Shape;171;p18"/>
           <p:cNvSpPr/>
           <p:nvPr/>
         </p:nvSpPr>
         <p:spPr>
           <a:xfrm>
             <a:off x="582930" y="4423410"/>
-            <a:ext cx="8023860" cy="445770"/>
+            <a:ext cx="8023800" cy="445800"/>
           </a:xfrm>
           <a:prstGeom prst="rect">
             <a:avLst/>
@@ -19221,7 +19113,7 @@
       </p:sp>
       <p:sp>
         <p:nvSpPr>
-          <p:cNvPr id="174" name="Google Shape;174;p18"/>
+          <p:cNvPr id="172" name="Google Shape;172;p18"/>
           <p:cNvSpPr/>
           <p:nvPr/>
         </p:nvSpPr>
@@ -19284,7 +19176,7 @@
       </p:sp>
       <p:sp>
         <p:nvSpPr>
-          <p:cNvPr id="175" name="Google Shape;175;p18"/>
+          <p:cNvPr id="173" name="Google Shape;173;p18"/>
           <p:cNvSpPr/>
           <p:nvPr/>
         </p:nvSpPr>
@@ -19358,7 +19250,7 @@
   <p:cSld>
     <p:spTree>
       <p:nvGrpSpPr>
-        <p:cNvPr id="180" name="Shape 180"/>
+        <p:cNvPr id="178" name="Shape 178"/>
         <p:cNvGrpSpPr/>
         <p:nvPr/>
       </p:nvGrpSpPr>
@@ -19372,7 +19264,7 @@
       </p:grpSpPr>
       <p:sp>
         <p:nvSpPr>
-          <p:cNvPr id="181" name="Google Shape;181;p19"/>
+          <p:cNvPr id="179" name="Google Shape;179;p19"/>
           <p:cNvSpPr/>
           <p:nvPr/>
         </p:nvSpPr>
@@ -19415,7 +19307,7 @@
       </p:sp>
       <p:sp>
         <p:nvSpPr>
-          <p:cNvPr id="182" name="Google Shape;182;p19"/>
+          <p:cNvPr id="180" name="Google Shape;180;p19"/>
           <p:cNvSpPr/>
           <p:nvPr/>
         </p:nvSpPr>
@@ -19460,7 +19352,7 @@
       </p:sp>
       <p:sp>
         <p:nvSpPr>
-          <p:cNvPr id="183" name="Google Shape;183;p19"/>
+          <p:cNvPr id="181" name="Google Shape;181;p19"/>
           <p:cNvSpPr/>
           <p:nvPr/>
         </p:nvSpPr>
@@ -19523,7 +19415,7 @@
       </p:sp>
       <p:sp>
         <p:nvSpPr>
-          <p:cNvPr id="184" name="Google Shape;184;p19"/>
+          <p:cNvPr id="182" name="Google Shape;182;p19"/>
           <p:cNvSpPr/>
           <p:nvPr/>
         </p:nvSpPr>
@@ -19586,7 +19478,7 @@
       </p:sp>
       <p:sp>
         <p:nvSpPr>
-          <p:cNvPr id="185" name="Google Shape;185;p19"/>
+          <p:cNvPr id="183" name="Google Shape;183;p19"/>
           <p:cNvSpPr/>
           <p:nvPr/>
         </p:nvSpPr>
@@ -19649,7 +19541,7 @@
       </p:sp>
       <p:sp>
         <p:nvSpPr>
-          <p:cNvPr id="186" name="Google Shape;186;p19"/>
+          <p:cNvPr id="184" name="Google Shape;184;p19"/>
           <p:cNvSpPr/>
           <p:nvPr/>
         </p:nvSpPr>
@@ -19694,7 +19586,7 @@
       </p:sp>
       <p:sp>
         <p:nvSpPr>
-          <p:cNvPr id="187" name="Google Shape;187;p19"/>
+          <p:cNvPr id="185" name="Google Shape;185;p19"/>
           <p:cNvSpPr/>
           <p:nvPr/>
         </p:nvSpPr>
@@ -19737,7 +19629,7 @@
       </p:sp>
       <p:pic>
         <p:nvPicPr>
-          <p:cNvPr descr="/home/claude/metaverse_deck/icons/gamepad_white.png" id="188" name="Google Shape;188;p19"/>
+          <p:cNvPr descr="/home/claude/metaverse_deck/icons/gamepad_white.png" id="186" name="Google Shape;186;p19"/>
           <p:cNvPicPr preferRelativeResize="0"/>
           <p:nvPr/>
         </p:nvPicPr>
@@ -19764,7 +19656,7 @@
       </p:pic>
       <p:sp>
         <p:nvSpPr>
-          <p:cNvPr id="189" name="Google Shape;189;p19"/>
+          <p:cNvPr id="187" name="Google Shape;187;p19"/>
           <p:cNvSpPr/>
           <p:nvPr/>
         </p:nvSpPr>
@@ -19827,7 +19719,7 @@
       </p:sp>
       <p:sp>
         <p:nvSpPr>
-          <p:cNvPr id="190" name="Google Shape;190;p19"/>
+          <p:cNvPr id="188" name="Google Shape;188;p19"/>
           <p:cNvSpPr/>
           <p:nvPr/>
         </p:nvSpPr>
@@ -19933,7 +19825,7 @@
       </p:sp>
       <p:sp>
         <p:nvSpPr>
-          <p:cNvPr id="191" name="Google Shape;191;p19"/>
+          <p:cNvPr id="189" name="Google Shape;189;p19"/>
           <p:cNvSpPr/>
           <p:nvPr/>
         </p:nvSpPr>
@@ -19978,7 +19870,7 @@
       </p:sp>
       <p:sp>
         <p:nvSpPr>
-          <p:cNvPr id="192" name="Google Shape;192;p19"/>
+          <p:cNvPr id="190" name="Google Shape;190;p19"/>
           <p:cNvSpPr/>
           <p:nvPr/>
         </p:nvSpPr>
@@ -20021,7 +19913,7 @@
       </p:sp>
       <p:pic>
         <p:nvPicPr>
-          <p:cNvPr descr="/home/claude/metaverse_deck/icons/microphone_white.png" id="193" name="Google Shape;193;p19"/>
+          <p:cNvPr descr="/home/claude/metaverse_deck/icons/microphone_white.png" id="191" name="Google Shape;191;p19"/>
           <p:cNvPicPr preferRelativeResize="0"/>
           <p:nvPr/>
         </p:nvPicPr>
@@ -20048,7 +19940,7 @@
       </p:pic>
       <p:sp>
         <p:nvSpPr>
-          <p:cNvPr id="194" name="Google Shape;194;p19"/>
+          <p:cNvPr id="192" name="Google Shape;192;p19"/>
           <p:cNvSpPr/>
           <p:nvPr/>
         </p:nvSpPr>
@@ -20148,7 +20040,7 @@
       </p:sp>
       <p:sp>
         <p:nvSpPr>
-          <p:cNvPr id="195" name="Google Shape;195;p19"/>
+          <p:cNvPr id="193" name="Google Shape;193;p19"/>
           <p:cNvSpPr/>
           <p:nvPr/>
         </p:nvSpPr>
@@ -20294,7 +20186,7 @@
       </p:sp>
       <p:sp>
         <p:nvSpPr>
-          <p:cNvPr id="196" name="Google Shape;196;p19"/>
+          <p:cNvPr id="194" name="Google Shape;194;p19"/>
           <p:cNvSpPr/>
           <p:nvPr/>
         </p:nvSpPr>
@@ -20339,7 +20231,7 @@
       </p:sp>
       <p:sp>
         <p:nvSpPr>
-          <p:cNvPr id="197" name="Google Shape;197;p19"/>
+          <p:cNvPr id="195" name="Google Shape;195;p19"/>
           <p:cNvSpPr/>
           <p:nvPr/>
         </p:nvSpPr>
@@ -20382,7 +20274,7 @@
       </p:sp>
       <p:pic>
         <p:nvPicPr>
-          <p:cNvPr descr="/home/claude/metaverse_deck/icons/book_white.png" id="198" name="Google Shape;198;p19"/>
+          <p:cNvPr descr="/home/claude/metaverse_deck/icons/book_white.png" id="196" name="Google Shape;196;p19"/>
           <p:cNvPicPr preferRelativeResize="0"/>
           <p:nvPr/>
         </p:nvPicPr>
@@ -20409,7 +20301,7 @@
       </p:pic>
       <p:sp>
         <p:nvSpPr>
-          <p:cNvPr id="199" name="Google Shape;199;p19"/>
+          <p:cNvPr id="197" name="Google Shape;197;p19"/>
           <p:cNvSpPr/>
           <p:nvPr/>
         </p:nvSpPr>
@@ -20472,7 +20364,7 @@
       </p:sp>
       <p:sp>
         <p:nvSpPr>
-          <p:cNvPr id="200" name="Google Shape;200;p19"/>
+          <p:cNvPr id="198" name="Google Shape;198;p19"/>
           <p:cNvSpPr/>
           <p:nvPr/>
         </p:nvSpPr>
@@ -20578,7 +20470,7 @@
       </p:sp>
       <p:sp>
         <p:nvSpPr>
-          <p:cNvPr id="201" name="Google Shape;201;p19"/>
+          <p:cNvPr id="199" name="Google Shape;199;p19"/>
           <p:cNvSpPr/>
           <p:nvPr/>
         </p:nvSpPr>
@@ -20623,7 +20515,7 @@
       </p:sp>
       <p:sp>
         <p:nvSpPr>
-          <p:cNvPr id="202" name="Google Shape;202;p19"/>
+          <p:cNvPr id="200" name="Google Shape;200;p19"/>
           <p:cNvSpPr/>
           <p:nvPr/>
         </p:nvSpPr>
@@ -20666,7 +20558,7 @@
       </p:sp>
       <p:pic>
         <p:nvPicPr>
-          <p:cNvPr descr="/home/claude/metaverse_deck/icons/briefcase_white.png" id="203" name="Google Shape;203;p19"/>
+          <p:cNvPr descr="/home/claude/metaverse_deck/icons/briefcase_white.png" id="201" name="Google Shape;201;p19"/>
           <p:cNvPicPr preferRelativeResize="0"/>
           <p:nvPr/>
         </p:nvPicPr>
@@ -20693,7 +20585,7 @@
       </p:pic>
       <p:sp>
         <p:nvSpPr>
-          <p:cNvPr id="204" name="Google Shape;204;p19"/>
+          <p:cNvPr id="202" name="Google Shape;202;p19"/>
           <p:cNvSpPr/>
           <p:nvPr/>
         </p:nvSpPr>
@@ -20793,7 +20685,7 @@
       </p:sp>
       <p:sp>
         <p:nvSpPr>
-          <p:cNvPr id="205" name="Google Shape;205;p19"/>
+          <p:cNvPr id="203" name="Google Shape;203;p19"/>
           <p:cNvSpPr/>
           <p:nvPr/>
         </p:nvSpPr>
@@ -20899,7 +20791,7 @@
       </p:sp>
       <p:sp>
         <p:nvSpPr>
-          <p:cNvPr id="206" name="Google Shape;206;p19"/>
+          <p:cNvPr id="204" name="Google Shape;204;p19"/>
           <p:cNvSpPr/>
           <p:nvPr/>
         </p:nvSpPr>
@@ -20944,7 +20836,7 @@
       </p:sp>
       <p:sp>
         <p:nvSpPr>
-          <p:cNvPr id="207" name="Google Shape;207;p19"/>
+          <p:cNvPr id="205" name="Google Shape;205;p19"/>
           <p:cNvSpPr/>
           <p:nvPr/>
         </p:nvSpPr>
@@ -20987,7 +20879,7 @@
       </p:sp>
       <p:pic>
         <p:nvPicPr>
-          <p:cNvPr descr="/home/claude/metaverse_deck/icons/shopping_bag_white.png" id="208" name="Google Shape;208;p19"/>
+          <p:cNvPr descr="/home/claude/metaverse_deck/icons/shopping_bag_white.png" id="206" name="Google Shape;206;p19"/>
           <p:cNvPicPr preferRelativeResize="0"/>
           <p:nvPr/>
         </p:nvPicPr>
@@ -21014,7 +20906,7 @@
       </p:pic>
       <p:sp>
         <p:nvSpPr>
-          <p:cNvPr id="209" name="Google Shape;209;p19"/>
+          <p:cNvPr id="207" name="Google Shape;207;p19"/>
           <p:cNvSpPr/>
           <p:nvPr/>
         </p:nvSpPr>
@@ -21114,7 +21006,7 @@
       </p:sp>
       <p:sp>
         <p:nvSpPr>
-          <p:cNvPr id="210" name="Google Shape;210;p19"/>
+          <p:cNvPr id="208" name="Google Shape;208;p19"/>
           <p:cNvSpPr/>
           <p:nvPr/>
         </p:nvSpPr>
@@ -21220,7 +21112,7 @@
       </p:sp>
       <p:sp>
         <p:nvSpPr>
-          <p:cNvPr id="211" name="Google Shape;211;p19"/>
+          <p:cNvPr id="209" name="Google Shape;209;p19"/>
           <p:cNvSpPr/>
           <p:nvPr/>
         </p:nvSpPr>
@@ -21283,7 +21175,7 @@
       </p:sp>
       <p:sp>
         <p:nvSpPr>
-          <p:cNvPr id="212" name="Google Shape;212;p19"/>
+          <p:cNvPr id="210" name="Google Shape;210;p19"/>
           <p:cNvSpPr/>
           <p:nvPr/>
         </p:nvSpPr>
@@ -21357,7 +21249,7 @@
   <p:cSld>
     <p:spTree>
       <p:nvGrpSpPr>
-        <p:cNvPr id="217" name="Shape 217"/>
+        <p:cNvPr id="215" name="Shape 215"/>
         <p:cNvGrpSpPr/>
         <p:nvPr/>
       </p:nvGrpSpPr>
@@ -21371,7 +21263,7 @@
       </p:grpSpPr>
       <p:sp>
         <p:nvSpPr>
-          <p:cNvPr id="218" name="Google Shape;218;p20"/>
+          <p:cNvPr id="216" name="Google Shape;216;p20"/>
           <p:cNvSpPr/>
           <p:nvPr/>
         </p:nvSpPr>
@@ -21414,7 +21306,7 @@
       </p:sp>
       <p:sp>
         <p:nvSpPr>
-          <p:cNvPr id="219" name="Google Shape;219;p20"/>
+          <p:cNvPr id="217" name="Google Shape;217;p20"/>
           <p:cNvSpPr/>
           <p:nvPr/>
         </p:nvSpPr>
@@ -21459,7 +21351,7 @@
       </p:sp>
       <p:sp>
         <p:nvSpPr>
-          <p:cNvPr id="220" name="Google Shape;220;p20"/>
+          <p:cNvPr id="218" name="Google Shape;218;p20"/>
           <p:cNvSpPr/>
           <p:nvPr/>
         </p:nvSpPr>
@@ -21522,7 +21414,7 @@
       </p:sp>
       <p:sp>
         <p:nvSpPr>
-          <p:cNvPr id="221" name="Google Shape;221;p20"/>
+          <p:cNvPr id="219" name="Google Shape;219;p20"/>
           <p:cNvSpPr/>
           <p:nvPr/>
         </p:nvSpPr>
@@ -21585,7 +21477,7 @@
       </p:sp>
       <p:sp>
         <p:nvSpPr>
-          <p:cNvPr id="222" name="Google Shape;222;p20"/>
+          <p:cNvPr id="220" name="Google Shape;220;p20"/>
           <p:cNvSpPr/>
           <p:nvPr/>
         </p:nvSpPr>
@@ -21630,7 +21522,7 @@
       </p:sp>
       <p:sp>
         <p:nvSpPr>
-          <p:cNvPr id="223" name="Google Shape;223;p20"/>
+          <p:cNvPr id="221" name="Google Shape;221;p20"/>
           <p:cNvSpPr/>
           <p:nvPr/>
         </p:nvSpPr>
@@ -21673,7 +21565,7 @@
       </p:sp>
       <p:pic>
         <p:nvPicPr>
-          <p:cNvPr descr="/home/claude/metaverse_deck/icons/coins_white.png" id="224" name="Google Shape;224;p20"/>
+          <p:cNvPr descr="/home/claude/metaverse_deck/icons/coins_white.png" id="222" name="Google Shape;222;p20"/>
           <p:cNvPicPr preferRelativeResize="0"/>
           <p:nvPr/>
         </p:nvPicPr>
@@ -21700,7 +21592,7 @@
       </p:pic>
       <p:sp>
         <p:nvSpPr>
-          <p:cNvPr id="225" name="Google Shape;225;p20"/>
+          <p:cNvPr id="223" name="Google Shape;223;p20"/>
           <p:cNvSpPr/>
           <p:nvPr/>
         </p:nvSpPr>
@@ -21763,7 +21655,7 @@
       </p:sp>
       <p:sp>
         <p:nvSpPr>
-          <p:cNvPr id="226" name="Google Shape;226;p20"/>
+          <p:cNvPr id="224" name="Google Shape;224;p20"/>
           <p:cNvSpPr/>
           <p:nvPr/>
         </p:nvSpPr>
@@ -21949,7 +21841,7 @@
       </p:sp>
       <p:sp>
         <p:nvSpPr>
-          <p:cNvPr id="227" name="Google Shape;227;p20"/>
+          <p:cNvPr id="225" name="Google Shape;225;p20"/>
           <p:cNvSpPr/>
           <p:nvPr/>
         </p:nvSpPr>
@@ -21994,7 +21886,7 @@
       </p:sp>
       <p:sp>
         <p:nvSpPr>
-          <p:cNvPr id="228" name="Google Shape;228;p20"/>
+          <p:cNvPr id="226" name="Google Shape;226;p20"/>
           <p:cNvSpPr/>
           <p:nvPr/>
         </p:nvSpPr>
@@ -22037,7 +21929,7 @@
       </p:sp>
       <p:pic>
         <p:nvPicPr>
-          <p:cNvPr descr="/home/claude/metaverse_deck/icons/link_chain_white.png" id="229" name="Google Shape;229;p20"/>
+          <p:cNvPr descr="/home/claude/metaverse_deck/icons/link_chain_white.png" id="227" name="Google Shape;227;p20"/>
           <p:cNvPicPr preferRelativeResize="0"/>
           <p:nvPr/>
         </p:nvPicPr>
@@ -22064,7 +21956,7 @@
       </p:pic>
       <p:sp>
         <p:nvSpPr>
-          <p:cNvPr id="230" name="Google Shape;230;p20"/>
+          <p:cNvPr id="228" name="Google Shape;228;p20"/>
           <p:cNvSpPr/>
           <p:nvPr/>
         </p:nvSpPr>
@@ -22127,7 +22019,7 @@
       </p:sp>
       <p:sp>
         <p:nvSpPr>
-          <p:cNvPr id="231" name="Google Shape;231;p20"/>
+          <p:cNvPr id="229" name="Google Shape;229;p20"/>
           <p:cNvSpPr/>
           <p:nvPr/>
         </p:nvSpPr>
@@ -22273,7 +22165,7 @@
       </p:sp>
       <p:sp>
         <p:nvSpPr>
-          <p:cNvPr id="232" name="Google Shape;232;p20"/>
+          <p:cNvPr id="230" name="Google Shape;230;p20"/>
           <p:cNvSpPr/>
           <p:nvPr/>
         </p:nvSpPr>
@@ -22336,7 +22228,7 @@
       </p:sp>
       <p:sp>
         <p:nvSpPr>
-          <p:cNvPr id="233" name="Google Shape;233;p20"/>
+          <p:cNvPr id="231" name="Google Shape;231;p20"/>
           <p:cNvSpPr/>
           <p:nvPr/>
         </p:nvSpPr>
@@ -22410,7 +22302,7 @@
   <p:cSld>
     <p:spTree>
       <p:nvGrpSpPr>
-        <p:cNvPr id="238" name="Shape 238"/>
+        <p:cNvPr id="236" name="Shape 236"/>
         <p:cNvGrpSpPr/>
         <p:nvPr/>
       </p:nvGrpSpPr>
@@ -22424,7 +22316,7 @@
       </p:grpSpPr>
       <p:sp>
         <p:nvSpPr>
-          <p:cNvPr id="239" name="Google Shape;239;p21"/>
+          <p:cNvPr id="237" name="Google Shape;237;p21"/>
           <p:cNvSpPr/>
           <p:nvPr/>
         </p:nvSpPr>
@@ -22467,7 +22359,7 @@
       </p:sp>
       <p:sp>
         <p:nvSpPr>
-          <p:cNvPr id="240" name="Google Shape;240;p21"/>
+          <p:cNvPr id="238" name="Google Shape;238;p21"/>
           <p:cNvSpPr/>
           <p:nvPr/>
         </p:nvSpPr>
@@ -22512,7 +22404,7 @@
       </p:sp>
       <p:sp>
         <p:nvSpPr>
-          <p:cNvPr id="241" name="Google Shape;241;p21"/>
+          <p:cNvPr id="239" name="Google Shape;239;p21"/>
           <p:cNvSpPr/>
           <p:nvPr/>
         </p:nvSpPr>
@@ -22575,7 +22467,7 @@
       </p:sp>
       <p:sp>
         <p:nvSpPr>
-          <p:cNvPr id="242" name="Google Shape;242;p21"/>
+          <p:cNvPr id="240" name="Google Shape;240;p21"/>
           <p:cNvSpPr/>
           <p:nvPr/>
         </p:nvSpPr>
@@ -22638,7 +22530,7 @@
       </p:sp>
       <p:graphicFrame>
         <p:nvGraphicFramePr>
-          <p:cNvPr id="243" name="Google Shape;243;p21"/>
+          <p:cNvPr id="241" name="Google Shape;241;p21"/>
           <p:cNvGraphicFramePr/>
           <p:nvPr/>
         </p:nvGraphicFramePr>
@@ -22651,7 +22543,7 @@
             <a:tbl>
               <a:tblPr>
                 <a:noFill/>
-                <a:tableStyleId>{B8D73487-4B9A-4EB3-AE3C-88ED599BB840}</a:tableStyleId>
+                <a:tableStyleId>{1B85D6DC-6274-489A-A74C-3609BF297A02}</a:tableStyleId>
               </a:tblPr>
               <a:tblGrid>
                 <a:gridCol w="1062975"/>
@@ -24093,7 +23985,7 @@
       </p:graphicFrame>
       <p:sp>
         <p:nvSpPr>
-          <p:cNvPr id="244" name="Google Shape;244;p21"/>
+          <p:cNvPr id="242" name="Google Shape;242;p21"/>
           <p:cNvSpPr/>
           <p:nvPr/>
         </p:nvSpPr>
@@ -24156,7 +24048,7 @@
       </p:sp>
       <p:sp>
         <p:nvSpPr>
-          <p:cNvPr id="245" name="Google Shape;245;p21"/>
+          <p:cNvPr id="243" name="Google Shape;243;p21"/>
           <p:cNvSpPr/>
           <p:nvPr/>
         </p:nvSpPr>
@@ -24205,7 +24097,7 @@
       </p:sp>
       <p:cxnSp>
         <p:nvCxnSpPr>
-          <p:cNvPr id="246" name="Google Shape;246;p21"/>
+          <p:cNvPr id="244" name="Google Shape;244;p21"/>
           <p:cNvCxnSpPr/>
           <p:nvPr/>
         </p:nvCxnSpPr>
@@ -24231,7 +24123,7 @@
       </p:cxnSp>
       <p:cxnSp>
         <p:nvCxnSpPr>
-          <p:cNvPr id="247" name="Google Shape;247;p21"/>
+          <p:cNvPr id="245" name="Google Shape;245;p21"/>
           <p:cNvCxnSpPr/>
           <p:nvPr/>
         </p:nvCxnSpPr>
@@ -24257,7 +24149,7 @@
       </p:cxnSp>
       <p:sp>
         <p:nvSpPr>
-          <p:cNvPr id="248" name="Google Shape;248;p21"/>
+          <p:cNvPr id="246" name="Google Shape;246;p21"/>
           <p:cNvSpPr/>
           <p:nvPr/>
         </p:nvSpPr>
@@ -24306,7 +24198,7 @@
       </p:sp>
       <p:sp>
         <p:nvSpPr>
-          <p:cNvPr id="249" name="Google Shape;249;p21"/>
+          <p:cNvPr id="247" name="Google Shape;247;p21"/>
           <p:cNvSpPr/>
           <p:nvPr/>
         </p:nvSpPr>
@@ -24369,7 +24261,7 @@
       </p:sp>
       <p:sp>
         <p:nvSpPr>
-          <p:cNvPr id="250" name="Google Shape;250;p21"/>
+          <p:cNvPr id="248" name="Google Shape;248;p21"/>
           <p:cNvSpPr/>
           <p:nvPr/>
         </p:nvSpPr>
@@ -24418,7 +24310,7 @@
       </p:sp>
       <p:sp>
         <p:nvSpPr>
-          <p:cNvPr id="251" name="Google Shape;251;p21"/>
+          <p:cNvPr id="249" name="Google Shape;249;p21"/>
           <p:cNvSpPr/>
           <p:nvPr/>
         </p:nvSpPr>
@@ -24481,7 +24373,7 @@
       </p:sp>
       <p:sp>
         <p:nvSpPr>
-          <p:cNvPr id="252" name="Google Shape;252;p21"/>
+          <p:cNvPr id="250" name="Google Shape;250;p21"/>
           <p:cNvSpPr/>
           <p:nvPr/>
         </p:nvSpPr>
@@ -24530,7 +24422,7 @@
       </p:sp>
       <p:sp>
         <p:nvSpPr>
-          <p:cNvPr id="253" name="Google Shape;253;p21"/>
+          <p:cNvPr id="251" name="Google Shape;251;p21"/>
           <p:cNvSpPr/>
           <p:nvPr/>
         </p:nvSpPr>
@@ -24630,7 +24522,7 @@
       </p:sp>
       <p:sp>
         <p:nvSpPr>
-          <p:cNvPr id="254" name="Google Shape;254;p21"/>
+          <p:cNvPr id="252" name="Google Shape;252;p21"/>
           <p:cNvSpPr/>
           <p:nvPr/>
         </p:nvSpPr>
@@ -24679,7 +24571,7 @@
       </p:sp>
       <p:sp>
         <p:nvSpPr>
-          <p:cNvPr id="255" name="Google Shape;255;p21"/>
+          <p:cNvPr id="253" name="Google Shape;253;p21"/>
           <p:cNvSpPr/>
           <p:nvPr/>
         </p:nvSpPr>
@@ -24742,7 +24634,7 @@
       </p:sp>
       <p:sp>
         <p:nvSpPr>
-          <p:cNvPr id="256" name="Google Shape;256;p21"/>
+          <p:cNvPr id="254" name="Google Shape;254;p21"/>
           <p:cNvSpPr/>
           <p:nvPr/>
         </p:nvSpPr>
@@ -24805,7 +24697,7 @@
       </p:sp>
       <p:sp>
         <p:nvSpPr>
-          <p:cNvPr id="257" name="Google Shape;257;p21"/>
+          <p:cNvPr id="255" name="Google Shape;255;p21"/>
           <p:cNvSpPr/>
           <p:nvPr/>
         </p:nvSpPr>
@@ -24868,7 +24760,7 @@
       </p:sp>
       <p:sp>
         <p:nvSpPr>
-          <p:cNvPr id="258" name="Google Shape;258;p21"/>
+          <p:cNvPr id="256" name="Google Shape;256;p21"/>
           <p:cNvSpPr/>
           <p:nvPr/>
         </p:nvSpPr>
@@ -24931,7 +24823,7 @@
       </p:sp>
       <p:sp>
         <p:nvSpPr>
-          <p:cNvPr id="259" name="Google Shape;259;p21"/>
+          <p:cNvPr id="257" name="Google Shape;257;p21"/>
           <p:cNvSpPr/>
           <p:nvPr/>
         </p:nvSpPr>
@@ -25005,7 +24897,7 @@
   <p:cSld>
     <p:spTree>
       <p:nvGrpSpPr>
-        <p:cNvPr id="264" name="Shape 264"/>
+        <p:cNvPr id="262" name="Shape 262"/>
         <p:cNvGrpSpPr/>
         <p:nvPr/>
       </p:nvGrpSpPr>
@@ -25019,7 +24911,7 @@
       </p:grpSpPr>
       <p:sp>
         <p:nvSpPr>
-          <p:cNvPr id="265" name="Google Shape;265;p22"/>
+          <p:cNvPr id="263" name="Google Shape;263;p22"/>
           <p:cNvSpPr/>
           <p:nvPr/>
         </p:nvSpPr>
@@ -25064,7 +24956,7 @@
       </p:sp>
       <p:sp>
         <p:nvSpPr>
-          <p:cNvPr id="266" name="Google Shape;266;p22"/>
+          <p:cNvPr id="264" name="Google Shape;264;p22"/>
           <p:cNvSpPr/>
           <p:nvPr/>
         </p:nvSpPr>
@@ -25127,7 +25019,7 @@
       </p:sp>
       <p:sp>
         <p:nvSpPr>
-          <p:cNvPr id="267" name="Google Shape;267;p22"/>
+          <p:cNvPr id="265" name="Google Shape;265;p22"/>
           <p:cNvSpPr/>
           <p:nvPr/>
         </p:nvSpPr>
@@ -25190,7 +25082,7 @@
       </p:sp>
       <p:sp>
         <p:nvSpPr>
-          <p:cNvPr id="268" name="Google Shape;268;p22"/>
+          <p:cNvPr id="266" name="Google Shape;266;p22"/>
           <p:cNvSpPr/>
           <p:nvPr/>
         </p:nvSpPr>
@@ -25253,7 +25145,7 @@
       </p:sp>
       <p:sp>
         <p:nvSpPr>
-          <p:cNvPr id="269" name="Google Shape;269;p22"/>
+          <p:cNvPr id="267" name="Google Shape;267;p22"/>
           <p:cNvSpPr/>
           <p:nvPr/>
         </p:nvSpPr>
@@ -25316,7 +25208,7 @@
       </p:sp>
       <p:pic>
         <p:nvPicPr>
-          <p:cNvPr descr="Roblox（ロブロックス）とは？安全な遊び方からおすすめのゲームまで紹介" id="270" name="Google Shape;270;p22"/>
+          <p:cNvPr descr="Roblox（ロブロックス）とは？安全な遊び方からおすすめのゲームまで紹介" id="268" name="Google Shape;268;p22"/>
           <p:cNvPicPr preferRelativeResize="0"/>
           <p:nvPr/>
         </p:nvPicPr>
@@ -25330,8 +25222,8 @@
         </p:blipFill>
         <p:spPr>
           <a:xfrm>
-            <a:off x="1927350" y="1357899"/>
-            <a:ext cx="6678074" cy="3505775"/>
+            <a:off x="2376250" y="1724500"/>
+            <a:ext cx="5898324" cy="3096425"/>
           </a:xfrm>
           <a:prstGeom prst="rect">
             <a:avLst/>
@@ -25342,6 +25234,56 @@
           </a:ln>
         </p:spPr>
       </p:pic>
+      <p:sp>
+        <p:nvSpPr>
+          <p:cNvPr id="269" name="Google Shape;269;p22"/>
+          <p:cNvSpPr txBox="1"/>
+          <p:nvPr/>
+        </p:nvSpPr>
+        <p:spPr>
+          <a:xfrm>
+            <a:off x="377200" y="1234900"/>
+            <a:ext cx="8295600" cy="400200"/>
+          </a:xfrm>
+          <a:prstGeom prst="rect">
+            <a:avLst/>
+          </a:prstGeom>
+          <a:noFill/>
+          <a:ln>
+            <a:noFill/>
+          </a:ln>
+        </p:spPr>
+        <p:txBody>
+          <a:bodyPr anchorCtr="0" anchor="t" bIns="91425" lIns="91425" spcFirstLastPara="1" rIns="91425" wrap="square" tIns="91425">
+            <a:spAutoFit/>
+          </a:bodyPr>
+          <a:lstStyle/>
+          <a:p>
+            <a:pPr indent="0" lvl="0" marL="0" rtl="0" algn="l">
+              <a:spcBef>
+                <a:spcPts val="0"/>
+              </a:spcBef>
+              <a:spcAft>
+                <a:spcPts val="0"/>
+              </a:spcAft>
+              <a:buNone/>
+            </a:pPr>
+            <a:r>
+              <a:rPr lang="ja"/>
+              <a:t>誰もがゲーム・ワールドを投稿できるプラットフォーム。『</a:t>
+            </a:r>
+            <a:r>
+              <a:rPr b="1" lang="ja"/>
+              <a:t>ゲーム版Youtube</a:t>
+            </a:r>
+            <a:r>
+              <a:rPr lang="ja"/>
+              <a:t>』とも言われる。</a:t>
+            </a:r>
+            <a:endParaRPr/>
+          </a:p>
+        </p:txBody>
+      </p:sp>
     </p:spTree>
   </p:cSld>
   <p:clrMapOvr>
@@ -25355,7 +25297,7 @@
   <p:cSld>
     <p:spTree>
       <p:nvGrpSpPr>
-        <p:cNvPr id="275" name="Shape 275"/>
+        <p:cNvPr id="274" name="Shape 274"/>
         <p:cNvGrpSpPr/>
         <p:nvPr/>
       </p:nvGrpSpPr>
@@ -25369,7 +25311,7 @@
       </p:grpSpPr>
       <p:sp>
         <p:nvSpPr>
-          <p:cNvPr id="276" name="Google Shape;276;p23"/>
+          <p:cNvPr id="275" name="Google Shape;275;p23"/>
           <p:cNvSpPr/>
           <p:nvPr/>
         </p:nvSpPr>
@@ -25412,7 +25354,7 @@
       </p:sp>
       <p:sp>
         <p:nvSpPr>
-          <p:cNvPr id="277" name="Google Shape;277;p23"/>
+          <p:cNvPr id="276" name="Google Shape;276;p23"/>
           <p:cNvSpPr/>
           <p:nvPr/>
         </p:nvSpPr>
@@ -25457,7 +25399,7 @@
       </p:sp>
       <p:sp>
         <p:nvSpPr>
-          <p:cNvPr id="278" name="Google Shape;278;p23"/>
+          <p:cNvPr id="277" name="Google Shape;277;p23"/>
           <p:cNvSpPr/>
           <p:nvPr/>
         </p:nvSpPr>
@@ -25520,7 +25462,7 @@
       </p:sp>
       <p:sp>
         <p:nvSpPr>
-          <p:cNvPr id="279" name="Google Shape;279;p23"/>
+          <p:cNvPr id="278" name="Google Shape;278;p23"/>
           <p:cNvSpPr/>
           <p:nvPr/>
         </p:nvSpPr>
@@ -25583,7 +25525,7 @@
       </p:sp>
       <p:cxnSp>
         <p:nvCxnSpPr>
-          <p:cNvPr id="280" name="Google Shape;280;p23"/>
+          <p:cNvPr id="279" name="Google Shape;279;p23"/>
           <p:cNvCxnSpPr/>
           <p:nvPr/>
         </p:nvCxnSpPr>
@@ -25609,7 +25551,7 @@
       </p:cxnSp>
       <p:cxnSp>
         <p:nvCxnSpPr>
-          <p:cNvPr id="281" name="Google Shape;281;p23"/>
+          <p:cNvPr id="280" name="Google Shape;280;p23"/>
           <p:cNvCxnSpPr/>
           <p:nvPr/>
         </p:nvCxnSpPr>
@@ -25635,7 +25577,7 @@
       </p:cxnSp>
       <p:cxnSp>
         <p:nvCxnSpPr>
-          <p:cNvPr id="282" name="Google Shape;282;p23"/>
+          <p:cNvPr id="281" name="Google Shape;281;p23"/>
           <p:cNvCxnSpPr/>
           <p:nvPr/>
         </p:nvCxnSpPr>
@@ -25661,7 +25603,7 @@
       </p:cxnSp>
       <p:cxnSp>
         <p:nvCxnSpPr>
-          <p:cNvPr id="283" name="Google Shape;283;p23"/>
+          <p:cNvPr id="282" name="Google Shape;282;p23"/>
           <p:cNvCxnSpPr/>
           <p:nvPr/>
         </p:nvCxnSpPr>
@@ -25687,7 +25629,7 @@
       </p:cxnSp>
       <p:cxnSp>
         <p:nvCxnSpPr>
-          <p:cNvPr id="284" name="Google Shape;284;p23"/>
+          <p:cNvPr id="283" name="Google Shape;283;p23"/>
           <p:cNvCxnSpPr/>
           <p:nvPr/>
         </p:nvCxnSpPr>
@@ -25713,7 +25655,7 @@
       </p:cxnSp>
       <p:sp>
         <p:nvSpPr>
-          <p:cNvPr id="285" name="Google Shape;285;p23"/>
+          <p:cNvPr id="284" name="Google Shape;284;p23"/>
           <p:cNvSpPr/>
           <p:nvPr/>
         </p:nvSpPr>
@@ -25758,7 +25700,7 @@
       </p:sp>
       <p:sp>
         <p:nvSpPr>
-          <p:cNvPr id="286" name="Google Shape;286;p23"/>
+          <p:cNvPr id="285" name="Google Shape;285;p23"/>
           <p:cNvSpPr/>
           <p:nvPr/>
         </p:nvSpPr>
@@ -25821,7 +25763,7 @@
       </p:sp>
       <p:sp>
         <p:nvSpPr>
-          <p:cNvPr id="287" name="Google Shape;287;p23"/>
+          <p:cNvPr id="286" name="Google Shape;286;p23"/>
           <p:cNvSpPr/>
           <p:nvPr/>
         </p:nvSpPr>
@@ -25866,7 +25808,7 @@
       </p:sp>
       <p:sp>
         <p:nvSpPr>
-          <p:cNvPr id="288" name="Google Shape;288;p23"/>
+          <p:cNvPr id="287" name="Google Shape;287;p23"/>
           <p:cNvSpPr/>
           <p:nvPr/>
         </p:nvSpPr>
@@ -25909,7 +25851,7 @@
       </p:sp>
       <p:pic>
         <p:nvPicPr>
-          <p:cNvPr descr="/home/claude/metaverse_deck/icons/building_white.png" id="289" name="Google Shape;289;p23"/>
+          <p:cNvPr descr="/home/claude/metaverse_deck/icons/building_white.png" id="288" name="Google Shape;288;p23"/>
           <p:cNvPicPr preferRelativeResize="0"/>
           <p:nvPr/>
         </p:nvPicPr>
@@ -25936,7 +25878,7 @@
       </p:pic>
       <p:sp>
         <p:nvSpPr>
-          <p:cNvPr id="290" name="Google Shape;290;p23"/>
+          <p:cNvPr id="289" name="Google Shape;289;p23"/>
           <p:cNvSpPr/>
           <p:nvPr/>
         </p:nvSpPr>
@@ -25999,7 +25941,7 @@
       </p:sp>
       <p:sp>
         <p:nvSpPr>
-          <p:cNvPr id="291" name="Google Shape;291;p23"/>
+          <p:cNvPr id="290" name="Google Shape;290;p23"/>
           <p:cNvSpPr/>
           <p:nvPr/>
         </p:nvSpPr>
@@ -26105,7 +26047,7 @@
       </p:sp>
       <p:sp>
         <p:nvSpPr>
-          <p:cNvPr id="292" name="Google Shape;292;p23"/>
+          <p:cNvPr id="291" name="Google Shape;291;p23"/>
           <p:cNvSpPr/>
           <p:nvPr/>
         </p:nvSpPr>
@@ -26150,7 +26092,7 @@
       </p:sp>
       <p:sp>
         <p:nvSpPr>
-          <p:cNvPr id="293" name="Google Shape;293;p23"/>
+          <p:cNvPr id="292" name="Google Shape;292;p23"/>
           <p:cNvSpPr/>
           <p:nvPr/>
         </p:nvSpPr>
@@ -26193,7 +26135,7 @@
       </p:sp>
       <p:pic>
         <p:nvPicPr>
-          <p:cNvPr descr="/home/claude/metaverse_deck/icons/chart_line_white.png" id="294" name="Google Shape;294;p23"/>
+          <p:cNvPr descr="/home/claude/metaverse_deck/icons/chart_line_white.png" id="293" name="Google Shape;293;p23"/>
           <p:cNvPicPr preferRelativeResize="0"/>
           <p:nvPr/>
         </p:nvPicPr>
@@ -26220,7 +26162,7 @@
       </p:pic>
       <p:sp>
         <p:nvSpPr>
-          <p:cNvPr id="295" name="Google Shape;295;p23"/>
+          <p:cNvPr id="294" name="Google Shape;294;p23"/>
           <p:cNvSpPr/>
           <p:nvPr/>
         </p:nvSpPr>
@@ -26283,7 +26225,7 @@
       </p:sp>
       <p:sp>
         <p:nvSpPr>
-          <p:cNvPr id="296" name="Google Shape;296;p23"/>
+          <p:cNvPr id="295" name="Google Shape;295;p23"/>
           <p:cNvSpPr/>
           <p:nvPr/>
         </p:nvSpPr>
@@ -26389,7 +26331,7 @@
       </p:sp>
       <p:sp>
         <p:nvSpPr>
-          <p:cNvPr id="297" name="Google Shape;297;p23"/>
+          <p:cNvPr id="296" name="Google Shape;296;p23"/>
           <p:cNvSpPr/>
           <p:nvPr/>
         </p:nvSpPr>
@@ -26434,7 +26376,7 @@
       </p:sp>
       <p:sp>
         <p:nvSpPr>
-          <p:cNvPr id="298" name="Google Shape;298;p23"/>
+          <p:cNvPr id="297" name="Google Shape;297;p23"/>
           <p:cNvSpPr/>
           <p:nvPr/>
         </p:nvSpPr>
@@ -26477,7 +26419,7 @@
       </p:sp>
       <p:pic>
         <p:nvPicPr>
-          <p:cNvPr descr="/home/claude/metaverse_deck/icons/coins_white.png" id="299" name="Google Shape;299;p23"/>
+          <p:cNvPr descr="/home/claude/metaverse_deck/icons/coins_white.png" id="298" name="Google Shape;298;p23"/>
           <p:cNvPicPr preferRelativeResize="0"/>
           <p:nvPr/>
         </p:nvPicPr>
@@ -26504,7 +26446,7 @@
       </p:pic>
       <p:sp>
         <p:nvSpPr>
-          <p:cNvPr id="300" name="Google Shape;300;p23"/>
+          <p:cNvPr id="299" name="Google Shape;299;p23"/>
           <p:cNvSpPr/>
           <p:nvPr/>
         </p:nvSpPr>
@@ -26567,7 +26509,7 @@
       </p:sp>
       <p:sp>
         <p:nvSpPr>
-          <p:cNvPr id="301" name="Google Shape;301;p23"/>
+          <p:cNvPr id="300" name="Google Shape;300;p23"/>
           <p:cNvSpPr/>
           <p:nvPr/>
         </p:nvSpPr>
@@ -26673,7 +26615,7 @@
       </p:sp>
       <p:sp>
         <p:nvSpPr>
-          <p:cNvPr id="302" name="Google Shape;302;p23"/>
+          <p:cNvPr id="301" name="Google Shape;301;p23"/>
           <p:cNvSpPr/>
           <p:nvPr/>
         </p:nvSpPr>
@@ -26718,7 +26660,7 @@
       </p:sp>
       <p:sp>
         <p:nvSpPr>
-          <p:cNvPr id="303" name="Google Shape;303;p23"/>
+          <p:cNvPr id="302" name="Google Shape;302;p23"/>
           <p:cNvSpPr/>
           <p:nvPr/>
         </p:nvSpPr>
@@ -26761,7 +26703,7 @@
       </p:sp>
       <p:pic>
         <p:nvPicPr>
-          <p:cNvPr descr="/home/claude/metaverse_deck/icons/tools_white.png" id="304" name="Google Shape;304;p23"/>
+          <p:cNvPr descr="/home/claude/metaverse_deck/icons/tools_white.png" id="303" name="Google Shape;303;p23"/>
           <p:cNvPicPr preferRelativeResize="0"/>
           <p:nvPr/>
         </p:nvPicPr>
@@ -26788,7 +26730,7 @@
       </p:pic>
       <p:sp>
         <p:nvSpPr>
-          <p:cNvPr id="305" name="Google Shape;305;p23"/>
+          <p:cNvPr id="304" name="Google Shape;304;p23"/>
           <p:cNvSpPr/>
           <p:nvPr/>
         </p:nvSpPr>
@@ -26851,7 +26793,7 @@
       </p:sp>
       <p:sp>
         <p:nvSpPr>
-          <p:cNvPr id="306" name="Google Shape;306;p23"/>
+          <p:cNvPr id="305" name="Google Shape;305;p23"/>
           <p:cNvSpPr/>
           <p:nvPr/>
         </p:nvSpPr>
@@ -26957,7 +26899,7 @@
       </p:sp>
       <p:sp>
         <p:nvSpPr>
-          <p:cNvPr id="307" name="Google Shape;307;p23"/>
+          <p:cNvPr id="306" name="Google Shape;306;p23"/>
           <p:cNvSpPr/>
           <p:nvPr/>
         </p:nvSpPr>
@@ -27002,7 +26944,7 @@
       </p:sp>
       <p:sp>
         <p:nvSpPr>
-          <p:cNvPr id="308" name="Google Shape;308;p23"/>
+          <p:cNvPr id="307" name="Google Shape;307;p23"/>
           <p:cNvSpPr/>
           <p:nvPr/>
         </p:nvSpPr>
@@ -27045,7 +26987,7 @@
       </p:sp>
       <p:pic>
         <p:nvPicPr>
-          <p:cNvPr descr="/home/claude/metaverse_deck/icons/desktop_white.png" id="309" name="Google Shape;309;p23"/>
+          <p:cNvPr descr="/home/claude/metaverse_deck/icons/desktop_white.png" id="308" name="Google Shape;308;p23"/>
           <p:cNvPicPr preferRelativeResize="0"/>
           <p:nvPr/>
         </p:nvPicPr>
@@ -27072,7 +27014,7 @@
       </p:pic>
       <p:sp>
         <p:nvSpPr>
-          <p:cNvPr id="310" name="Google Shape;310;p23"/>
+          <p:cNvPr id="309" name="Google Shape;309;p23"/>
           <p:cNvSpPr/>
           <p:nvPr/>
         </p:nvSpPr>
@@ -27135,7 +27077,7 @@
       </p:sp>
       <p:sp>
         <p:nvSpPr>
-          <p:cNvPr id="311" name="Google Shape;311;p23"/>
+          <p:cNvPr id="310" name="Google Shape;310;p23"/>
           <p:cNvSpPr/>
           <p:nvPr/>
         </p:nvSpPr>
@@ -27241,7 +27183,7 @@
       </p:sp>
       <p:sp>
         <p:nvSpPr>
-          <p:cNvPr id="312" name="Google Shape;312;p23"/>
+          <p:cNvPr id="311" name="Google Shape;311;p23"/>
           <p:cNvSpPr/>
           <p:nvPr/>
         </p:nvSpPr>
@@ -27304,7 +27246,7 @@
       </p:sp>
       <p:sp>
         <p:nvSpPr>
-          <p:cNvPr id="313" name="Google Shape;313;p23"/>
+          <p:cNvPr id="312" name="Google Shape;312;p23"/>
           <p:cNvSpPr/>
           <p:nvPr/>
         </p:nvSpPr>
@@ -27374,9 +27316,9 @@
 </file>
 
 <file path=ppt/theme/theme1.xml><?xml version="1.0" encoding="utf-8"?>
-<a:theme xmlns:a="http://schemas.openxmlformats.org/drawingml/2006/main" xmlns:r="http://schemas.openxmlformats.org/officeDocument/2006/relationships" name="Simple Light">
+<a:theme xmlns:a="http://schemas.openxmlformats.org/drawingml/2006/main" xmlns:r="http://schemas.openxmlformats.org/officeDocument/2006/relationships" name="Office Theme">
   <a:themeElements>
-    <a:clrScheme name="Simple Light">
+    <a:clrScheme name="Office">
       <a:dk1>
         <a:srgbClr val="000000"/>
       </a:dk1>
@@ -27384,34 +27326,34 @@
         <a:srgbClr val="FFFFFF"/>
       </a:lt1>
       <a:dk2>
-        <a:srgbClr val="595959"/>
+        <a:srgbClr val="44546A"/>
       </a:dk2>
       <a:lt2>
-        <a:srgbClr val="EEEEEE"/>
+        <a:srgbClr val="E7E6E6"/>
       </a:lt2>
       <a:accent1>
-        <a:srgbClr val="4285F4"/>
+        <a:srgbClr val="4472C4"/>
       </a:accent1>
       <a:accent2>
-        <a:srgbClr val="212121"/>
+        <a:srgbClr val="ED7D31"/>
       </a:accent2>
       <a:accent3>
-        <a:srgbClr val="78909C"/>
+        <a:srgbClr val="A5A5A5"/>
       </a:accent3>
       <a:accent4>
-        <a:srgbClr val="FFAB40"/>
+        <a:srgbClr val="FFC000"/>
       </a:accent4>
       <a:accent5>
-        <a:srgbClr val="0097A7"/>
+        <a:srgbClr val="5B9BD5"/>
       </a:accent5>
       <a:accent6>
-        <a:srgbClr val="EEFF41"/>
+        <a:srgbClr val="70AD47"/>
       </a:accent6>
       <a:hlink>
-        <a:srgbClr val="0097A7"/>
+        <a:srgbClr val="0563C1"/>
       </a:hlink>
       <a:folHlink>
-        <a:srgbClr val="0097A7"/>
+        <a:srgbClr val="954F72"/>
       </a:folHlink>
     </a:clrScheme>
     <a:fontScheme name="Office">
@@ -27653,9 +27595,9 @@
 </file>
 
 <file path=ppt/theme/theme2.xml><?xml version="1.0" encoding="utf-8"?>
-<a:theme xmlns:a="http://schemas.openxmlformats.org/drawingml/2006/main" xmlns:r="http://schemas.openxmlformats.org/officeDocument/2006/relationships" name="Office Theme">
+<a:theme xmlns:a="http://schemas.openxmlformats.org/drawingml/2006/main" xmlns:r="http://schemas.openxmlformats.org/officeDocument/2006/relationships" name="Simple Light">
   <a:themeElements>
-    <a:clrScheme name="Office">
+    <a:clrScheme name="Simple Light">
       <a:dk1>
         <a:srgbClr val="000000"/>
       </a:dk1>
@@ -27663,34 +27605,34 @@
         <a:srgbClr val="FFFFFF"/>
       </a:lt1>
       <a:dk2>
-        <a:srgbClr val="44546A"/>
+        <a:srgbClr val="595959"/>
       </a:dk2>
       <a:lt2>
-        <a:srgbClr val="E7E6E6"/>
+        <a:srgbClr val="EEEEEE"/>
       </a:lt2>
       <a:accent1>
-        <a:srgbClr val="4472C4"/>
+        <a:srgbClr val="4285F4"/>
       </a:accent1>
       <a:accent2>
-        <a:srgbClr val="ED7D31"/>
+        <a:srgbClr val="212121"/>
       </a:accent2>
       <a:accent3>
-        <a:srgbClr val="A5A5A5"/>
+        <a:srgbClr val="78909C"/>
       </a:accent3>
       <a:accent4>
-        <a:srgbClr val="FFC000"/>
+        <a:srgbClr val="FFAB40"/>
       </a:accent4>
       <a:accent5>
-        <a:srgbClr val="5B9BD5"/>
+        <a:srgbClr val="0097A7"/>
       </a:accent5>
       <a:accent6>
-        <a:srgbClr val="70AD47"/>
+        <a:srgbClr val="EEFF41"/>
       </a:accent6>
       <a:hlink>
-        <a:srgbClr val="0563C1"/>
+        <a:srgbClr val="0097A7"/>
       </a:hlink>
       <a:folHlink>
-        <a:srgbClr val="954F72"/>
+        <a:srgbClr val="0097A7"/>
       </a:folHlink>
     </a:clrScheme>
     <a:fontScheme name="Office">
